--- a/sjoskolan/vecka-44/aktuell/v44_01_Lagspanningssystem_elev.pptx
+++ b/sjoskolan/vecka-44/aktuell/v44_01_Lagspanningssystem_elev.pptx
@@ -4566,7 +4566,51 @@
                 <a:ea typeface="Calibri"/>
                 <a:cs typeface="Calibri"/>
               </a:rPr>
-              <a:t>Ifel ≈ U/Zfel</a:t>
+              <a:t>I</a:t>
+            </a:r>
+            <a:r>
+              <a:rPr sz="2400" b="1" baseline="-25000">
+                <a:solidFill>
+                  <a:srgbClr val="064F91"/>
+                </a:solidFill>
+                <a:latin typeface="Calibri"/>
+                <a:ea typeface="Calibri"/>
+                <a:cs typeface="Calibri"/>
+              </a:rPr>
+              <a:t>fel</a:t>
+            </a:r>
+            <a:r>
+              <a:rPr sz="2400" b="1">
+                <a:solidFill>
+                  <a:srgbClr val="064F91"/>
+                </a:solidFill>
+                <a:latin typeface="Calibri"/>
+                <a:ea typeface="Calibri"/>
+                <a:cs typeface="Calibri"/>
+              </a:rPr>
+              <a:t> ≈ U/</a:t>
+            </a:r>
+            <a:r>
+              <a:rPr sz="2400" b="1">
+                <a:solidFill>
+                  <a:srgbClr val="064F91"/>
+                </a:solidFill>
+                <a:latin typeface="Calibri"/>
+                <a:ea typeface="Calibri"/>
+                <a:cs typeface="Calibri"/>
+              </a:rPr>
+              <a:t>Z</a:t>
+            </a:r>
+            <a:r>
+              <a:rPr sz="2400" b="1" baseline="-25000">
+                <a:solidFill>
+                  <a:srgbClr val="064F91"/>
+                </a:solidFill>
+                <a:latin typeface="Calibri"/>
+                <a:ea typeface="Calibri"/>
+                <a:cs typeface="Calibri"/>
+              </a:rPr>
+              <a:t>fel</a:t>
             </a:r>
           </a:p>
         </p:txBody>
@@ -8172,7 +8216,7 @@
         <p:spPr>
           <a:xfrm xmlns:a="http://schemas.openxmlformats.org/drawingml/2006/main">
             <a:off x="762000" y="1619250"/>
-            <a:ext cx="7620000" cy="1466850"/>
+            <a:ext cx="3977639" cy="1466850"/>
           </a:xfrm>
           <a:prstGeom xmlns:a="http://schemas.openxmlformats.org/drawingml/2006/main" prst="rect">
             <a:avLst/>
@@ -8200,7 +8244,7 @@
               </a:defRPr>
             </a:pPr>
             <a:r>
-              <a:rPr sz="2400" b="0">
+              <a:rPr sz="1750" b="0">
                 <a:solidFill>
                   <a:srgbClr val="111111"/>
                 </a:solidFill>
@@ -8224,7 +8268,7 @@
               </a:defRPr>
             </a:pPr>
             <a:r>
-              <a:rPr sz="2400" b="0">
+              <a:rPr sz="1750" b="0">
                 <a:solidFill>
                   <a:srgbClr val="111111"/>
                 </a:solidFill>
@@ -8254,7 +8298,7 @@
         <p:spPr>
           <a:xfrm xmlns:a="http://schemas.openxmlformats.org/drawingml/2006/main">
             <a:off x="762000" y="3200400"/>
-            <a:ext cx="7620000" cy="838200"/>
+            <a:ext cx="3977639" cy="838200"/>
           </a:xfrm>
           <a:prstGeom xmlns:a="http://schemas.openxmlformats.org/drawingml/2006/main" prst="rect">
             <a:avLst/>
@@ -8282,7 +8326,7 @@
               </a:defRPr>
             </a:pPr>
             <a:r>
-              <a:rPr sz="2925" b="1">
+              <a:rPr sz="2300" b="1">
                 <a:solidFill>
                   <a:srgbClr val="064F91"/>
                 </a:solidFill>
@@ -8312,7 +8356,7 @@
         <p:spPr>
           <a:xfrm xmlns:a="http://schemas.openxmlformats.org/drawingml/2006/main">
             <a:off x="762000" y="4429125"/>
-            <a:ext cx="7620000" cy="1352550"/>
+            <a:ext cx="3977639" cy="1352550"/>
           </a:xfrm>
           <a:prstGeom xmlns:a="http://schemas.openxmlformats.org/drawingml/2006/main" prst="rect">
             <a:avLst/>
@@ -8340,7 +8384,7 @@
               </a:defRPr>
             </a:pPr>
             <a:r>
-              <a:rPr sz="2250" b="0">
+              <a:rPr sz="1800" b="0">
                 <a:solidFill>
                   <a:srgbClr val="111111"/>
                 </a:solidFill>
@@ -8364,7 +8408,7 @@
               </a:defRPr>
             </a:pPr>
             <a:r>
-              <a:rPr sz="2250" b="0">
+              <a:rPr sz="1800" b="0">
                 <a:solidFill>
                   <a:srgbClr val="111111"/>
                 </a:solidFill>
@@ -8435,6 +8479,30 @@
           </a:p>
         </p:txBody>
       </p:sp>
+      <p:pic xmlns:a="http://schemas.openxmlformats.org/drawingml/2006/main" xmlns:r="http://schemas.openxmlformats.org/officeDocument/2006/relationships">
+        <p:nvPicPr>
+          <p:cNvPr id="9" name="Figur: IT-system ombord: källan isolerad från s" descr="IT-system ombord: källan isolerad från skrovet, isolationsvakt mellan systemet och skrovet; första jordfelet ger liten ström och larm"/>
+          <p:cNvPicPr>
+            <a:picLocks noChangeAspect="1"/>
+          </p:cNvPicPr>
+          <p:nvPr/>
+        </p:nvPicPr>
+        <p:blipFill>
+          <a:blip r:embed="rId3"/>
+          <a:stretch>
+            <a:fillRect/>
+          </a:stretch>
+        </p:blipFill>
+        <p:spPr>
+          <a:xfrm>
+            <a:off x="4892040" y="1645920"/>
+            <a:ext cx="3886200" cy="3252383"/>
+          </a:xfrm>
+          <a:prstGeom prst="rect">
+            <a:avLst/>
+          </a:prstGeom>
+        </p:spPr>
+      </p:pic>
     </p:spTree>
     <p:extLst>
       <p:ext uri="{BB962C8B-B14F-4D97-AF65-F5344CB8AC3E}">
@@ -8556,7 +8624,7 @@
         <p:spPr>
           <a:xfrm xmlns:a="http://schemas.openxmlformats.org/drawingml/2006/main">
             <a:off x="762000" y="1619250"/>
-            <a:ext cx="7620000" cy="1466850"/>
+            <a:ext cx="3977639" cy="1466850"/>
           </a:xfrm>
           <a:prstGeom xmlns:a="http://schemas.openxmlformats.org/drawingml/2006/main" prst="rect">
             <a:avLst/>
@@ -8584,7 +8652,7 @@
               </a:defRPr>
             </a:pPr>
             <a:r>
-              <a:rPr sz="2400" b="0">
+              <a:rPr sz="1800" b="0">
                 <a:solidFill>
                   <a:srgbClr val="111111"/>
                 </a:solidFill>
@@ -8608,7 +8676,7 @@
               </a:defRPr>
             </a:pPr>
             <a:r>
-              <a:rPr sz="2400" b="0">
+              <a:rPr sz="1800" b="0">
                 <a:solidFill>
                   <a:srgbClr val="111111"/>
                 </a:solidFill>
@@ -8638,7 +8706,7 @@
         <p:spPr>
           <a:xfrm xmlns:a="http://schemas.openxmlformats.org/drawingml/2006/main">
             <a:off x="762000" y="3200400"/>
-            <a:ext cx="7620000" cy="838200"/>
+            <a:ext cx="3977639" cy="838200"/>
           </a:xfrm>
           <a:prstGeom xmlns:a="http://schemas.openxmlformats.org/drawingml/2006/main" prst="rect">
             <a:avLst/>
@@ -8666,7 +8734,7 @@
               </a:defRPr>
             </a:pPr>
             <a:r>
-              <a:rPr sz="2925" b="1">
+              <a:rPr sz="2650" b="1">
                 <a:solidFill>
                   <a:srgbClr val="064F91"/>
                 </a:solidFill>
@@ -8696,7 +8764,7 @@
         <p:spPr>
           <a:xfrm xmlns:a="http://schemas.openxmlformats.org/drawingml/2006/main">
             <a:off x="762000" y="4429125"/>
-            <a:ext cx="7620000" cy="1352550"/>
+            <a:ext cx="3977639" cy="1352550"/>
           </a:xfrm>
           <a:prstGeom xmlns:a="http://schemas.openxmlformats.org/drawingml/2006/main" prst="rect">
             <a:avLst/>
@@ -8724,7 +8792,7 @@
               </a:defRPr>
             </a:pPr>
             <a:r>
-              <a:rPr sz="2250" b="0">
+              <a:rPr sz="1800" b="0">
                 <a:solidFill>
                   <a:srgbClr val="111111"/>
                 </a:solidFill>
@@ -8748,7 +8816,7 @@
               </a:defRPr>
             </a:pPr>
             <a:r>
-              <a:rPr sz="2250" b="0">
+              <a:rPr sz="1800" b="0">
                 <a:solidFill>
                   <a:srgbClr val="111111"/>
                 </a:solidFill>
@@ -8819,6 +8887,30 @@
           </a:p>
         </p:txBody>
       </p:sp>
+      <p:pic xmlns:a="http://schemas.openxmlformats.org/drawingml/2006/main" xmlns:r="http://schemas.openxmlformats.org/officeDocument/2006/relationships">
+        <p:nvPicPr>
+          <p:cNvPr id="9" name="Figur: IT-system med ett andra jordfel på en an" descr="IT-system med ett andra jordfel på en annan fas: kortslutning mellan L1 och L2 via skrovet"/>
+          <p:cNvPicPr>
+            <a:picLocks noChangeAspect="1"/>
+          </p:cNvPicPr>
+          <p:nvPr/>
+        </p:nvPicPr>
+        <p:blipFill>
+          <a:blip r:embed="rId3"/>
+          <a:stretch>
+            <a:fillRect/>
+          </a:stretch>
+        </p:blipFill>
+        <p:spPr>
+          <a:xfrm>
+            <a:off x="4892040" y="1645920"/>
+            <a:ext cx="3886200" cy="3252383"/>
+          </a:xfrm>
+          <a:prstGeom prst="rect">
+            <a:avLst/>
+          </a:prstGeom>
+        </p:spPr>
+      </p:pic>
     </p:spTree>
     <p:extLst>
       <p:ext uri="{BB962C8B-B14F-4D97-AF65-F5344CB8AC3E}">
@@ -9058,7 +9150,29 @@
                 <a:ea typeface="Calibri"/>
                 <a:cs typeface="Calibri"/>
               </a:rPr>
-              <a:t>Iₖ ≈ U₀/Zs</a:t>
+              <a:t>Iₖ ≈ U₀/</a:t>
+            </a:r>
+            <a:r>
+              <a:rPr sz="2925" b="1">
+                <a:solidFill>
+                  <a:srgbClr val="064F91"/>
+                </a:solidFill>
+                <a:latin typeface="Calibri"/>
+                <a:ea typeface="Calibri"/>
+                <a:cs typeface="Calibri"/>
+              </a:rPr>
+              <a:t>Z</a:t>
+            </a:r>
+            <a:r>
+              <a:rPr sz="2925" b="1" baseline="-25000">
+                <a:solidFill>
+                  <a:srgbClr val="064F91"/>
+                </a:solidFill>
+                <a:latin typeface="Calibri"/>
+                <a:ea typeface="Calibri"/>
+                <a:cs typeface="Calibri"/>
+              </a:rPr>
+              <a:t>s</a:t>
             </a:r>
           </a:p>
         </p:txBody>
@@ -9116,7 +9230,40 @@
                 <a:ea typeface="Calibri"/>
                 <a:cs typeface="Calibri"/>
               </a:rPr>
-              <a:t>230 V och Zs = 0,46 Ω ger cirka 500 A.</a:t>
+              <a:t>230 V och </a:t>
+            </a:r>
+            <a:r>
+              <a:rPr sz="2250" b="0">
+                <a:solidFill>
+                  <a:srgbClr val="111111"/>
+                </a:solidFill>
+                <a:latin typeface="Calibri"/>
+                <a:ea typeface="Calibri"/>
+                <a:cs typeface="Calibri"/>
+              </a:rPr>
+              <a:t>Z</a:t>
+            </a:r>
+            <a:r>
+              <a:rPr sz="2250" b="0" baseline="-25000">
+                <a:solidFill>
+                  <a:srgbClr val="111111"/>
+                </a:solidFill>
+                <a:latin typeface="Calibri"/>
+                <a:ea typeface="Calibri"/>
+                <a:cs typeface="Calibri"/>
+              </a:rPr>
+              <a:t>s</a:t>
+            </a:r>
+            <a:r>
+              <a:rPr sz="2250" b="0">
+                <a:solidFill>
+                  <a:srgbClr val="111111"/>
+                </a:solidFill>
+                <a:latin typeface="Calibri"/>
+                <a:ea typeface="Calibri"/>
+                <a:cs typeface="Calibri"/>
+              </a:rPr>
+              <a:t> = 0,32 Ω ger cirka 720 A.</a:t>
             </a:r>
           </a:p>
           <a:p xmlns:a="http://schemas.openxmlformats.org/drawingml/2006/main">
@@ -9323,7 +9470,7 @@
         <p:spPr>
           <a:xfrm xmlns:a="http://schemas.openxmlformats.org/drawingml/2006/main">
             <a:off x="762000" y="1571625"/>
-            <a:ext cx="7620000" cy="990600"/>
+            <a:ext cx="3977639" cy="990600"/>
           </a:xfrm>
           <a:prstGeom xmlns:a="http://schemas.openxmlformats.org/drawingml/2006/main" prst="rect">
             <a:avLst/>
@@ -9350,15 +9497,48 @@
               </a:defRPr>
             </a:pPr>
             <a:r>
-              <a:rPr sz="2175" b="0">
-                <a:solidFill>
-                  <a:srgbClr val="111111"/>
-                </a:solidFill>
-                <a:latin typeface="Calibri"/>
-                <a:ea typeface="Calibri"/>
-                <a:cs typeface="Calibri"/>
-              </a:rPr>
-              <a:t>En förenklad felströmsslinga har U₀ = 230 V och Zs = 0,575 Ω.</a:t>
+              <a:rPr sz="2100" b="0">
+                <a:solidFill>
+                  <a:srgbClr val="111111"/>
+                </a:solidFill>
+                <a:latin typeface="Calibri"/>
+                <a:ea typeface="Calibri"/>
+                <a:cs typeface="Calibri"/>
+              </a:rPr>
+              <a:t>En förenklad felströmsslinga har U₀ = 230 V och </a:t>
+            </a:r>
+            <a:r>
+              <a:rPr sz="2100" b="0">
+                <a:solidFill>
+                  <a:srgbClr val="111111"/>
+                </a:solidFill>
+                <a:latin typeface="Calibri"/>
+                <a:ea typeface="Calibri"/>
+                <a:cs typeface="Calibri"/>
+              </a:rPr>
+              <a:t>Z</a:t>
+            </a:r>
+            <a:r>
+              <a:rPr sz="2100" b="0" baseline="-25000">
+                <a:solidFill>
+                  <a:srgbClr val="111111"/>
+                </a:solidFill>
+                <a:latin typeface="Calibri"/>
+                <a:ea typeface="Calibri"/>
+                <a:cs typeface="Calibri"/>
+              </a:rPr>
+              <a:t>s</a:t>
+            </a:r>
+            <a:r>
+              <a:rPr sz="2100" b="0">
+                <a:solidFill>
+                  <a:srgbClr val="111111"/>
+                </a:solidFill>
+                <a:latin typeface="Calibri"/>
+                <a:ea typeface="Calibri"/>
+                <a:cs typeface="Calibri"/>
+              </a:rPr>
+              <a:t> = 0,575 Ω.</a:t>
             </a:r>
           </a:p>
         </p:txBody>
@@ -9380,7 +9560,7 @@
         <p:spPr>
           <a:xfrm xmlns:a="http://schemas.openxmlformats.org/drawingml/2006/main">
             <a:off x="762000" y="2705100"/>
-            <a:ext cx="7620000" cy="790575"/>
+            <a:ext cx="3977639" cy="790575"/>
           </a:xfrm>
           <a:prstGeom xmlns:a="http://schemas.openxmlformats.org/drawingml/2006/main" prst="rect">
             <a:avLst/>
@@ -9415,7 +9595,29 @@
                 <a:ea typeface="Calibri"/>
                 <a:cs typeface="Calibri"/>
               </a:rPr>
-              <a:t>Iₖ ≈ U₀/Zs</a:t>
+              <a:t>Iₖ ≈ U₀/</a:t>
+            </a:r>
+            <a:r>
+              <a:rPr sz="2325" b="1">
+                <a:solidFill>
+                  <a:srgbClr val="064F91"/>
+                </a:solidFill>
+                <a:latin typeface="Calibri"/>
+                <a:ea typeface="Calibri"/>
+                <a:cs typeface="Calibri"/>
+              </a:rPr>
+              <a:t>Z</a:t>
+            </a:r>
+            <a:r>
+              <a:rPr sz="2325" b="1" baseline="-25000">
+                <a:solidFill>
+                  <a:srgbClr val="064F91"/>
+                </a:solidFill>
+                <a:latin typeface="Calibri"/>
+                <a:ea typeface="Calibri"/>
+                <a:cs typeface="Calibri"/>
+              </a:rPr>
+              <a:t>s</a:t>
             </a:r>
           </a:p>
         </p:txBody>
@@ -9437,7 +9639,7 @@
         <p:spPr>
           <a:xfrm xmlns:a="http://schemas.openxmlformats.org/drawingml/2006/main">
             <a:off x="762000" y="3657600"/>
-            <a:ext cx="7620000" cy="1524000"/>
+            <a:ext cx="3977639" cy="1524000"/>
           </a:xfrm>
           <a:prstGeom xmlns:a="http://schemas.openxmlformats.org/drawingml/2006/main" prst="rect">
             <a:avLst/>
@@ -9464,15 +9666,15 @@
               </a:defRPr>
             </a:pPr>
             <a:r>
-              <a:rPr sz="2063" b="0">
-                <a:solidFill>
-                  <a:srgbClr val="111111"/>
-                </a:solidFill>
-                <a:latin typeface="Calibri"/>
-                <a:ea typeface="Calibri"/>
-                <a:cs typeface="Calibri"/>
-              </a:rPr>
-              <a:t>1. Iₖ ≈ 230/0,575 = 400 A.</a:t>
+              <a:rPr sz="1800" b="0">
+                <a:solidFill>
+                  <a:srgbClr val="111111"/>
+                </a:solidFill>
+                <a:latin typeface="Calibri"/>
+                <a:ea typeface="Calibri"/>
+                <a:cs typeface="Calibri"/>
+              </a:rPr>
+              <a:t>1. Iₖ ≈ 230/0,575 = 400 A.</a:t>
             </a:r>
           </a:p>
           <a:p xmlns:a="http://schemas.openxmlformats.org/drawingml/2006/main">
@@ -9487,15 +9689,48 @@
               </a:defRPr>
             </a:pPr>
             <a:r>
-              <a:rPr sz="2063" b="0">
-                <a:solidFill>
-                  <a:srgbClr val="111111"/>
-                </a:solidFill>
-                <a:latin typeface="Calibri"/>
-                <a:ea typeface="Calibri"/>
-                <a:cs typeface="Calibri"/>
-              </a:rPr>
-              <a:t>2. Om Zs fördubblas till 1,15 Ω blir Iₖ ≈ 230/1,15 = 200 A.</a:t>
+              <a:rPr sz="1800" b="0">
+                <a:solidFill>
+                  <a:srgbClr val="111111"/>
+                </a:solidFill>
+                <a:latin typeface="Calibri"/>
+                <a:ea typeface="Calibri"/>
+                <a:cs typeface="Calibri"/>
+              </a:rPr>
+              <a:t>2. Om </a:t>
+            </a:r>
+            <a:r>
+              <a:rPr sz="1800" b="0">
+                <a:solidFill>
+                  <a:srgbClr val="111111"/>
+                </a:solidFill>
+                <a:latin typeface="Calibri"/>
+                <a:ea typeface="Calibri"/>
+                <a:cs typeface="Calibri"/>
+              </a:rPr>
+              <a:t>Z</a:t>
+            </a:r>
+            <a:r>
+              <a:rPr sz="1800" b="0" baseline="-25000">
+                <a:solidFill>
+                  <a:srgbClr val="111111"/>
+                </a:solidFill>
+                <a:latin typeface="Calibri"/>
+                <a:ea typeface="Calibri"/>
+                <a:cs typeface="Calibri"/>
+              </a:rPr>
+              <a:t>s</a:t>
+            </a:r>
+            <a:r>
+              <a:rPr sz="1800" b="0">
+                <a:solidFill>
+                  <a:srgbClr val="111111"/>
+                </a:solidFill>
+                <a:latin typeface="Calibri"/>
+                <a:ea typeface="Calibri"/>
+                <a:cs typeface="Calibri"/>
+              </a:rPr>
+              <a:t> fördubblas till 1,15 Ω blir Iₖ ≈ 230/1,15 = 200 A.</a:t>
             </a:r>
           </a:p>
           <a:p xmlns:a="http://schemas.openxmlformats.org/drawingml/2006/main">
@@ -9510,7 +9745,7 @@
               </a:defRPr>
             </a:pPr>
             <a:r>
-              <a:rPr sz="2063" b="0">
+              <a:rPr sz="1800" b="0">
                 <a:solidFill>
                   <a:srgbClr val="111111"/>
                 </a:solidFill>
@@ -9540,7 +9775,7 @@
         <p:spPr>
           <a:xfrm xmlns:a="http://schemas.openxmlformats.org/drawingml/2006/main">
             <a:off x="762000" y="5372100"/>
-            <a:ext cx="7620000" cy="685800"/>
+            <a:ext cx="3977639" cy="685800"/>
           </a:xfrm>
           <a:prstGeom xmlns:a="http://schemas.openxmlformats.org/drawingml/2006/main" prst="rect">
             <a:avLst/>
@@ -9567,15 +9802,48 @@
               </a:defRPr>
             </a:pPr>
             <a:r>
-              <a:rPr sz="1913" b="0">
-                <a:solidFill>
-                  <a:srgbClr val="111111"/>
-                </a:solidFill>
-                <a:latin typeface="Calibri"/>
-                <a:ea typeface="Calibri"/>
-                <a:cs typeface="Calibri"/>
-              </a:rPr>
-              <a:t>Utlösningstid kan inte bestämmas utan skyddsdata. Modellen visar hur högre Zs minskar felströmmen.</a:t>
+              <a:rPr sz="1550" b="0">
+                <a:solidFill>
+                  <a:srgbClr val="111111"/>
+                </a:solidFill>
+                <a:latin typeface="Calibri"/>
+                <a:ea typeface="Calibri"/>
+                <a:cs typeface="Calibri"/>
+              </a:rPr>
+              <a:t>Utlösningstid kan inte bestämmas utan skyddsdata. Modellen visar hur högre </a:t>
+            </a:r>
+            <a:r>
+              <a:rPr sz="1550" b="0">
+                <a:solidFill>
+                  <a:srgbClr val="111111"/>
+                </a:solidFill>
+                <a:latin typeface="Calibri"/>
+                <a:ea typeface="Calibri"/>
+                <a:cs typeface="Calibri"/>
+              </a:rPr>
+              <a:t>Z</a:t>
+            </a:r>
+            <a:r>
+              <a:rPr sz="1550" b="0" baseline="-25000">
+                <a:solidFill>
+                  <a:srgbClr val="111111"/>
+                </a:solidFill>
+                <a:latin typeface="Calibri"/>
+                <a:ea typeface="Calibri"/>
+                <a:cs typeface="Calibri"/>
+              </a:rPr>
+              <a:t>s</a:t>
+            </a:r>
+            <a:r>
+              <a:rPr sz="1550" b="0">
+                <a:solidFill>
+                  <a:srgbClr val="111111"/>
+                </a:solidFill>
+                <a:latin typeface="Calibri"/>
+                <a:ea typeface="Calibri"/>
+                <a:cs typeface="Calibri"/>
+              </a:rPr>
+              <a:t> minskar felströmmen.</a:t>
             </a:r>
           </a:p>
         </p:txBody>
@@ -9637,6 +9905,30 @@
           </a:p>
         </p:txBody>
       </p:sp>
+      <p:pic xmlns:a="http://schemas.openxmlformats.org/drawingml/2006/main" xmlns:r="http://schemas.openxmlformats.org/officeDocument/2006/relationships">
+        <p:nvPicPr>
+          <p:cNvPr id="16" name="Figur: Felström som funktion av slingimpedans: " descr="Felström som funktion av slingimpedans: 0,575 ohm ger 400 A och 1,15 ohm ger 200 A"/>
+          <p:cNvPicPr>
+            <a:picLocks noChangeAspect="1"/>
+          </p:cNvPicPr>
+          <p:nvPr/>
+        </p:nvPicPr>
+        <p:blipFill>
+          <a:blip r:embed="rId3"/>
+          <a:stretch>
+            <a:fillRect/>
+          </a:stretch>
+        </p:blipFill>
+        <p:spPr>
+          <a:xfrm>
+            <a:off x="4892040" y="1645920"/>
+            <a:ext cx="3886200" cy="2890202"/>
+          </a:xfrm>
+          <a:prstGeom prst="rect">
+            <a:avLst/>
+          </a:prstGeom>
+        </p:spPr>
+      </p:pic>
     </p:spTree>
     <p:extLst>
       <p:ext uri="{BB962C8B-B14F-4D97-AF65-F5344CB8AC3E}">
@@ -9792,7 +10084,106 @@
                 <a:ea typeface="Calibri"/>
                 <a:cs typeface="Calibri"/>
               </a:rPr>
-              <a:t>ΔU = I · Rslinga     Ulast = Ukälla − ΔU</a:t>
+              <a:t>ΔU = I · </a:t>
+            </a:r>
+            <a:r>
+              <a:rPr sz="2400" b="1">
+                <a:solidFill>
+                  <a:srgbClr val="064F91"/>
+                </a:solidFill>
+                <a:latin typeface="Calibri"/>
+                <a:ea typeface="Calibri"/>
+                <a:cs typeface="Calibri"/>
+              </a:rPr>
+              <a:t>R</a:t>
+            </a:r>
+            <a:r>
+              <a:rPr sz="2400" b="1" baseline="-25000">
+                <a:solidFill>
+                  <a:srgbClr val="064F91"/>
+                </a:solidFill>
+                <a:latin typeface="Calibri"/>
+                <a:ea typeface="Calibri"/>
+                <a:cs typeface="Calibri"/>
+              </a:rPr>
+              <a:t>slinga</a:t>
+            </a:r>
+            <a:r>
+              <a:rPr sz="2400" b="1">
+                <a:solidFill>
+                  <a:srgbClr val="064F91"/>
+                </a:solidFill>
+                <a:latin typeface="Calibri"/>
+                <a:ea typeface="Calibri"/>
+                <a:cs typeface="Calibri"/>
+              </a:rPr>
+              <a:t>     </a:t>
+            </a:r>
+            <a:r>
+              <a:rPr sz="2400" b="1">
+                <a:solidFill>
+                  <a:srgbClr val="064F91"/>
+                </a:solidFill>
+                <a:latin typeface="Calibri"/>
+                <a:ea typeface="Calibri"/>
+                <a:cs typeface="Calibri"/>
+              </a:rPr>
+              <a:t>U</a:t>
+            </a:r>
+            <a:r>
+              <a:rPr sz="2400" b="1" baseline="-25000">
+                <a:solidFill>
+                  <a:srgbClr val="064F91"/>
+                </a:solidFill>
+                <a:latin typeface="Calibri"/>
+                <a:ea typeface="Calibri"/>
+                <a:cs typeface="Calibri"/>
+              </a:rPr>
+              <a:t>last</a:t>
+            </a:r>
+            <a:r>
+              <a:rPr sz="2400" b="1">
+                <a:solidFill>
+                  <a:srgbClr val="064F91"/>
+                </a:solidFill>
+                <a:latin typeface="Calibri"/>
+                <a:ea typeface="Calibri"/>
+                <a:cs typeface="Calibri"/>
+              </a:rPr>
+              <a:t> = </a:t>
+            </a:r>
+            <a:r>
+              <a:rPr sz="2400" b="1">
+                <a:solidFill>
+                  <a:srgbClr val="064F91"/>
+                </a:solidFill>
+                <a:latin typeface="Calibri"/>
+                <a:ea typeface="Calibri"/>
+                <a:cs typeface="Calibri"/>
+              </a:rPr>
+              <a:t>U</a:t>
+            </a:r>
+            <a:r>
+              <a:rPr sz="2400" b="1" baseline="-25000">
+                <a:solidFill>
+                  <a:srgbClr val="064F91"/>
+                </a:solidFill>
+                <a:latin typeface="Calibri"/>
+                <a:ea typeface="Calibri"/>
+                <a:cs typeface="Calibri"/>
+              </a:rPr>
+              <a:t>källa</a:t>
+            </a:r>
+            <a:r>
+              <a:rPr sz="2400" b="1">
+                <a:solidFill>
+                  <a:srgbClr val="064F91"/>
+                </a:solidFill>
+                <a:latin typeface="Calibri"/>
+                <a:ea typeface="Calibri"/>
+                <a:cs typeface="Calibri"/>
+              </a:rPr>
+              <a:t> − ΔU</a:t>
             </a:r>
           </a:p>
         </p:txBody>
@@ -9849,7 +10240,29 @@
                 <a:ea typeface="Calibri"/>
                 <a:cs typeface="Calibri"/>
               </a:rPr>
-              <a:t>Rslinga omfattar både fram- och returväg. U och ΔU anges i V, I i A och R i Ω.</a:t>
+              <a:t>R</a:t>
+            </a:r>
+            <a:r>
+              <a:rPr sz="2100" b="0" baseline="-25000">
+                <a:solidFill>
+                  <a:srgbClr val="111111"/>
+                </a:solidFill>
+                <a:latin typeface="Calibri"/>
+                <a:ea typeface="Calibri"/>
+                <a:cs typeface="Calibri"/>
+              </a:rPr>
+              <a:t>slinga</a:t>
+            </a:r>
+            <a:r>
+              <a:rPr sz="2100" b="0">
+                <a:solidFill>
+                  <a:srgbClr val="111111"/>
+                </a:solidFill>
+                <a:latin typeface="Calibri"/>
+                <a:ea typeface="Calibri"/>
+                <a:cs typeface="Calibri"/>
+              </a:rPr>
+              <a:t> omfattar både fram- och returväg. U och ΔU anges i V, I i A och R i Ω.</a:t>
             </a:r>
           </a:p>
         </p:txBody>
@@ -9906,7 +10319,73 @@
                 <a:ea typeface="Calibri"/>
                 <a:cs typeface="Calibri"/>
               </a:rPr>
-              <a:t>Förutsättningar: Konstant DC: Ukälla = 24 V, I = 6 A, Rslinga = 0,15 Ω.</a:t>
+              <a:t>Förutsättningar: Konstant DC: </a:t>
+            </a:r>
+            <a:r>
+              <a:rPr sz="2025" b="0">
+                <a:solidFill>
+                  <a:srgbClr val="111111"/>
+                </a:solidFill>
+                <a:latin typeface="Calibri"/>
+                <a:ea typeface="Calibri"/>
+                <a:cs typeface="Calibri"/>
+              </a:rPr>
+              <a:t>U</a:t>
+            </a:r>
+            <a:r>
+              <a:rPr sz="2025" b="0" baseline="-25000">
+                <a:solidFill>
+                  <a:srgbClr val="111111"/>
+                </a:solidFill>
+                <a:latin typeface="Calibri"/>
+                <a:ea typeface="Calibri"/>
+                <a:cs typeface="Calibri"/>
+              </a:rPr>
+              <a:t>källa</a:t>
+            </a:r>
+            <a:r>
+              <a:rPr sz="2025" b="0">
+                <a:solidFill>
+                  <a:srgbClr val="111111"/>
+                </a:solidFill>
+                <a:latin typeface="Calibri"/>
+                <a:ea typeface="Calibri"/>
+                <a:cs typeface="Calibri"/>
+              </a:rPr>
+              <a:t> = 24 V, I = 6 A, </a:t>
+            </a:r>
+            <a:r>
+              <a:rPr sz="2025" b="0">
+                <a:solidFill>
+                  <a:srgbClr val="111111"/>
+                </a:solidFill>
+                <a:latin typeface="Calibri"/>
+                <a:ea typeface="Calibri"/>
+                <a:cs typeface="Calibri"/>
+              </a:rPr>
+              <a:t>R</a:t>
+            </a:r>
+            <a:r>
+              <a:rPr sz="2025" b="0" baseline="-25000">
+                <a:solidFill>
+                  <a:srgbClr val="111111"/>
+                </a:solidFill>
+                <a:latin typeface="Calibri"/>
+                <a:ea typeface="Calibri"/>
+                <a:cs typeface="Calibri"/>
+              </a:rPr>
+              <a:t>slinga</a:t>
+            </a:r>
+            <a:r>
+              <a:rPr sz="2025" b="0">
+                <a:solidFill>
+                  <a:srgbClr val="111111"/>
+                </a:solidFill>
+                <a:latin typeface="Calibri"/>
+                <a:ea typeface="Calibri"/>
+                <a:cs typeface="Calibri"/>
+              </a:rPr>
+              <a:t> = 0,15 Ω.</a:t>
             </a:r>
           </a:p>
         </p:txBody>
@@ -10204,7 +10683,7 @@
         <p:spPr>
           <a:xfrm xmlns:a="http://schemas.openxmlformats.org/drawingml/2006/main">
             <a:off x="762000" y="2533650"/>
-            <a:ext cx="7620000" cy="2286000"/>
+            <a:ext cx="3886200" cy="2606040"/>
           </a:xfrm>
           <a:prstGeom xmlns:a="http://schemas.openxmlformats.org/drawingml/2006/main" prst="rect">
             <a:avLst/>
@@ -10240,7 +10719,7 @@
                 <a:ea typeface="Calibri"/>
                 <a:cs typeface="Calibri"/>
               </a:rPr>
-              <a:t>En 24 V-last tar 6 A. Slingresistansen i matningen är 0,15 Ω. Beräkna spänningsfallet och lastspänningen.</a:t>
+              <a:t>En 24 V-last tar 6 A. Slingresistansen i matningen är 0,15 Ω. Beräkna spänningsfallet och lastspänningen.</a:t>
             </a:r>
           </a:p>
         </p:txBody>
@@ -10361,6 +10840,30 @@
           </a:p>
         </p:txBody>
       </p:sp>
+      <p:pic xmlns:a="http://schemas.openxmlformats.org/drawingml/2006/main" xmlns:r="http://schemas.openxmlformats.org/officeDocument/2006/relationships">
+        <p:nvPicPr>
+          <p:cNvPr id="9" name="Figur: 24 V-matning till en last som tar 6 A vi" descr="24 V-matning till en last som tar 6 A via ledningar med slingresistansen 0,15 ohm; spänningsfall och lastspänning okända"/>
+          <p:cNvPicPr>
+            <a:picLocks noChangeAspect="1"/>
+          </p:cNvPicPr>
+          <p:nvPr/>
+        </p:nvPicPr>
+        <p:blipFill>
+          <a:blip r:embed="rId3"/>
+          <a:stretch>
+            <a:fillRect/>
+          </a:stretch>
+        </p:blipFill>
+        <p:spPr>
+          <a:xfrm>
+            <a:off x="4846320" y="2331720"/>
+            <a:ext cx="3931920" cy="2740984"/>
+          </a:xfrm>
+          <a:prstGeom prst="rect">
+            <a:avLst/>
+          </a:prstGeom>
+        </p:spPr>
+      </p:pic>
     </p:spTree>
     <p:extLst>
       <p:ext uri="{BB962C8B-B14F-4D97-AF65-F5344CB8AC3E}">
@@ -10516,7 +11019,29 @@
                 <a:ea typeface="Calibri"/>
                 <a:cs typeface="Calibri"/>
               </a:rPr>
-              <a:t>Iₖ ≈ U₀/Zs</a:t>
+              <a:t>Iₖ ≈ U₀/</a:t>
+            </a:r>
+            <a:r>
+              <a:rPr sz="2400" b="1">
+                <a:solidFill>
+                  <a:srgbClr val="064F91"/>
+                </a:solidFill>
+                <a:latin typeface="Calibri"/>
+                <a:ea typeface="Calibri"/>
+                <a:cs typeface="Calibri"/>
+              </a:rPr>
+              <a:t>Z</a:t>
+            </a:r>
+            <a:r>
+              <a:rPr sz="2400" b="1" baseline="-25000">
+                <a:solidFill>
+                  <a:srgbClr val="064F91"/>
+                </a:solidFill>
+                <a:latin typeface="Calibri"/>
+                <a:ea typeface="Calibri"/>
+                <a:cs typeface="Calibri"/>
+              </a:rPr>
+              <a:t>s</a:t>
             </a:r>
           </a:p>
         </p:txBody>
@@ -10573,7 +11098,40 @@
                 <a:ea typeface="Calibri"/>
                 <a:cs typeface="Calibri"/>
               </a:rPr>
-              <a:t>Iₖ är beräknad felström, U₀ drivande spänning och Zs hela felströmsslingans impedansbelopp.</a:t>
+              <a:t>Iₖ är beräknad felström, U₀ drivande spänning och </a:t>
+            </a:r>
+            <a:r>
+              <a:rPr sz="2100" b="0">
+                <a:solidFill>
+                  <a:srgbClr val="111111"/>
+                </a:solidFill>
+                <a:latin typeface="Calibri"/>
+                <a:ea typeface="Calibri"/>
+                <a:cs typeface="Calibri"/>
+              </a:rPr>
+              <a:t>Z</a:t>
+            </a:r>
+            <a:r>
+              <a:rPr sz="2100" b="0" baseline="-25000">
+                <a:solidFill>
+                  <a:srgbClr val="111111"/>
+                </a:solidFill>
+                <a:latin typeface="Calibri"/>
+                <a:ea typeface="Calibri"/>
+                <a:cs typeface="Calibri"/>
+              </a:rPr>
+              <a:t>s</a:t>
+            </a:r>
+            <a:r>
+              <a:rPr sz="2100" b="0">
+                <a:solidFill>
+                  <a:srgbClr val="111111"/>
+                </a:solidFill>
+                <a:latin typeface="Calibri"/>
+                <a:ea typeface="Calibri"/>
+                <a:cs typeface="Calibri"/>
+              </a:rPr>
+              <a:t> hela felströmsslingans impedansbelopp.</a:t>
             </a:r>
           </a:p>
         </p:txBody>
@@ -10630,7 +11188,40 @@
                 <a:ea typeface="Calibri"/>
                 <a:cs typeface="Calibri"/>
               </a:rPr>
-              <a:t>Förutsättningar: Förenklad modell: U₀ = 230 V och Zs = 0,46 Ω.</a:t>
+              <a:t>Förutsättningar: Förenklad modell: U₀ = 230 V och </a:t>
+            </a:r>
+            <a:r>
+              <a:rPr sz="2025" b="0">
+                <a:solidFill>
+                  <a:srgbClr val="111111"/>
+                </a:solidFill>
+                <a:latin typeface="Calibri"/>
+                <a:ea typeface="Calibri"/>
+                <a:cs typeface="Calibri"/>
+              </a:rPr>
+              <a:t>Z</a:t>
+            </a:r>
+            <a:r>
+              <a:rPr sz="2025" b="0" baseline="-25000">
+                <a:solidFill>
+                  <a:srgbClr val="111111"/>
+                </a:solidFill>
+                <a:latin typeface="Calibri"/>
+                <a:ea typeface="Calibri"/>
+                <a:cs typeface="Calibri"/>
+              </a:rPr>
+              <a:t>s</a:t>
+            </a:r>
+            <a:r>
+              <a:rPr sz="2025" b="0">
+                <a:solidFill>
+                  <a:srgbClr val="111111"/>
+                </a:solidFill>
+                <a:latin typeface="Calibri"/>
+                <a:ea typeface="Calibri"/>
+                <a:cs typeface="Calibri"/>
+              </a:rPr>
+              <a:t> = 0,46 Ω.</a:t>
             </a:r>
           </a:p>
         </p:txBody>
@@ -10928,7 +11519,7 @@
         <p:spPr>
           <a:xfrm xmlns:a="http://schemas.openxmlformats.org/drawingml/2006/main">
             <a:off x="762000" y="2533650"/>
-            <a:ext cx="7620000" cy="2286000"/>
+            <a:ext cx="3886200" cy="2606040"/>
           </a:xfrm>
           <a:prstGeom xmlns:a="http://schemas.openxmlformats.org/drawingml/2006/main" prst="rect">
             <a:avLst/>
@@ -10964,7 +11555,40 @@
                 <a:ea typeface="Calibri"/>
                 <a:cs typeface="Calibri"/>
               </a:rPr>
-              <a:t>I en beräkningsmodell är U₀ = 230 V och Zs = 0,46 Ω. Beräkna Iₖ.</a:t>
+              <a:t>I en beräkningsmodell är U₀ = 230 V och </a:t>
+            </a:r>
+            <a:r>
+              <a:rPr sz="2400" b="0">
+                <a:solidFill>
+                  <a:srgbClr val="111111"/>
+                </a:solidFill>
+                <a:latin typeface="Calibri"/>
+                <a:ea typeface="Calibri"/>
+                <a:cs typeface="Calibri"/>
+              </a:rPr>
+              <a:t>Z</a:t>
+            </a:r>
+            <a:r>
+              <a:rPr sz="2400" b="0" baseline="-25000">
+                <a:solidFill>
+                  <a:srgbClr val="111111"/>
+                </a:solidFill>
+                <a:latin typeface="Calibri"/>
+                <a:ea typeface="Calibri"/>
+                <a:cs typeface="Calibri"/>
+              </a:rPr>
+              <a:t>s</a:t>
+            </a:r>
+            <a:r>
+              <a:rPr sz="2400" b="0">
+                <a:solidFill>
+                  <a:srgbClr val="111111"/>
+                </a:solidFill>
+                <a:latin typeface="Calibri"/>
+                <a:ea typeface="Calibri"/>
+                <a:cs typeface="Calibri"/>
+              </a:rPr>
+              <a:t> = 0,46 Ω. Beräkna Iₖ.</a:t>
             </a:r>
           </a:p>
         </p:txBody>
@@ -11085,6 +11709,30 @@
           </a:p>
         </p:txBody>
       </p:sp>
+      <p:pic xmlns:a="http://schemas.openxmlformats.org/drawingml/2006/main" xmlns:r="http://schemas.openxmlformats.org/officeDocument/2006/relationships">
+        <p:nvPicPr>
+          <p:cNvPr id="9" name="Figur: Förenklad felströmsslinga med U0 = 230 V" descr="Förenklad felströmsslinga med U0 = 230 V och Zs = 0,46 ohm; felströmmen okänd"/>
+          <p:cNvPicPr>
+            <a:picLocks noChangeAspect="1"/>
+          </p:cNvPicPr>
+          <p:nvPr/>
+        </p:nvPicPr>
+        <p:blipFill>
+          <a:blip r:embed="rId3"/>
+          <a:stretch>
+            <a:fillRect/>
+          </a:stretch>
+        </p:blipFill>
+        <p:spPr>
+          <a:xfrm>
+            <a:off x="4846320" y="2331720"/>
+            <a:ext cx="3931920" cy="2740984"/>
+          </a:xfrm>
+          <a:prstGeom prst="rect">
+            <a:avLst/>
+          </a:prstGeom>
+        </p:spPr>
+      </p:pic>
     </p:spTree>
     <p:extLst>
       <p:ext uri="{BB962C8B-B14F-4D97-AF65-F5344CB8AC3E}">
@@ -11297,7 +11945,40 @@
                 <a:ea typeface="Calibri"/>
                 <a:cs typeface="Calibri"/>
               </a:rPr>
-              <a:t>Index 1 och 2 betecknar två fall. Vid samma U₀ är strömmen omvänt proportionell mot Zs.</a:t>
+              <a:t>Index 1 och 2 betecknar två fall. Vid samma U₀ är strömmen omvänt proportionell mot </a:t>
+            </a:r>
+            <a:r>
+              <a:rPr sz="2100" b="0">
+                <a:solidFill>
+                  <a:srgbClr val="111111"/>
+                </a:solidFill>
+                <a:latin typeface="Calibri"/>
+                <a:ea typeface="Calibri"/>
+                <a:cs typeface="Calibri"/>
+              </a:rPr>
+              <a:t>Z</a:t>
+            </a:r>
+            <a:r>
+              <a:rPr sz="2100" b="0" baseline="-25000">
+                <a:solidFill>
+                  <a:srgbClr val="111111"/>
+                </a:solidFill>
+                <a:latin typeface="Calibri"/>
+                <a:ea typeface="Calibri"/>
+                <a:cs typeface="Calibri"/>
+              </a:rPr>
+              <a:t>s</a:t>
+            </a:r>
+            <a:r>
+              <a:rPr sz="2100" b="0">
+                <a:solidFill>
+                  <a:srgbClr val="111111"/>
+                </a:solidFill>
+                <a:latin typeface="Calibri"/>
+                <a:ea typeface="Calibri"/>
+                <a:cs typeface="Calibri"/>
+              </a:rPr>
+              <a:t>.</a:t>
             </a:r>
           </a:p>
         </p:txBody>
@@ -12202,7 +12883,29 @@
                 <a:ea typeface="Calibri"/>
                 <a:cs typeface="Calibri"/>
               </a:rPr>
-              <a:t>Zs ökar från 0,46 till 0,92 Ω vid oförändrade 230 V. Hur ändras felströmmen?</a:t>
+              <a:t>Z</a:t>
+            </a:r>
+            <a:r>
+              <a:rPr sz="2400" b="0" baseline="-25000">
+                <a:solidFill>
+                  <a:srgbClr val="111111"/>
+                </a:solidFill>
+                <a:latin typeface="Calibri"/>
+                <a:ea typeface="Calibri"/>
+                <a:cs typeface="Calibri"/>
+              </a:rPr>
+              <a:t>s</a:t>
+            </a:r>
+            <a:r>
+              <a:rPr sz="2400" b="0">
+                <a:solidFill>
+                  <a:srgbClr val="111111"/>
+                </a:solidFill>
+                <a:latin typeface="Calibri"/>
+                <a:ea typeface="Calibri"/>
+                <a:cs typeface="Calibri"/>
+              </a:rPr>
+              <a:t> ökar från 0,46 till 0,92 Ω vid oförändrade 230 V. Hur ändras felströmmen?</a:t>
             </a:r>
           </a:p>
         </p:txBody>
@@ -14414,64 +15117,6 @@
       </p:sp>
       <p:sp>
         <p:nvSpPr>
-          <p:cNvPr id="7" name="Källor och lärarstöd finns även i bildanteckningarna.">
-            <a:extLst xmlns:a="http://schemas.openxmlformats.org/drawingml/2006/main">
-              <a:ext uri="{FF2B5EF4-FFF2-40B4-BE49-F238E27FC236}">
-                <a16:creationId xmlns:a16="http://schemas.microsoft.com/office/drawing/2014/main" id="{A84445C5-569D-4416-85E7-DFE62B84E947}"/>
-              </a:ext>
-            </a:extLst>
-          </p:cNvPr>
-          <p:cNvSpPr>
-            <a:spLocks xmlns:a="http://schemas.openxmlformats.org/drawingml/2006/main" noGrp="1"/>
-          </p:cNvSpPr>
-          <p:nvPr/>
-        </p:nvSpPr>
-        <p:spPr>
-          <a:xfrm xmlns:a="http://schemas.openxmlformats.org/drawingml/2006/main">
-            <a:off x="762000" y="5676900"/>
-            <a:ext cx="7620000" cy="352425"/>
-          </a:xfrm>
-          <a:prstGeom xmlns:a="http://schemas.openxmlformats.org/drawingml/2006/main" prst="rect">
-            <a:avLst/>
-          </a:prstGeom>
-          <a:noFill xmlns:a="http://schemas.openxmlformats.org/drawingml/2006/main"/>
-          <a:ln xmlns:a="http://schemas.openxmlformats.org/drawingml/2006/main" w="0">
-            <a:noFill/>
-          </a:ln>
-        </p:spPr>
-        <p:txBody>
-          <a:bodyPr xmlns:a="http://schemas.openxmlformats.org/drawingml/2006/main" wrap="square" lIns="0" tIns="0" rIns="0" bIns="0" anchor="t">
-            <a:noAutofit/>
-          </a:bodyPr>
-          <a:lstStyle xmlns:a="http://schemas.openxmlformats.org/drawingml/2006/main"/>
-          <a:p xmlns:a="http://schemas.openxmlformats.org/drawingml/2006/main">
-            <a:pPr algn="l">
-              <a:buNone/>
-              <a:defRPr sz="1800" b="0">
-                <a:solidFill>
-                  <a:srgbClr val="111111"/>
-                </a:solidFill>
-                <a:latin typeface="Calibri"/>
-                <a:ea typeface="Calibri"/>
-                <a:cs typeface="Calibri"/>
-              </a:defRPr>
-            </a:pPr>
-            <a:r>
-              <a:rPr sz="1800" b="0">
-                <a:solidFill>
-                  <a:srgbClr val="111111"/>
-                </a:solidFill>
-                <a:latin typeface="Calibri"/>
-                <a:ea typeface="Calibri"/>
-                <a:cs typeface="Calibri"/>
-              </a:rPr>
-              <a:t>Källor och lärarstöd finns även i bildanteckningarna.</a:t>
-            </a:r>
-          </a:p>
-        </p:txBody>
-      </p:sp>
-      <p:sp>
-        <p:nvSpPr>
           <p:cNvPr id="8" name="22">
             <a:extLst xmlns:a="http://schemas.openxmlformats.org/drawingml/2006/main">
               <a:ext uri="{FF2B5EF4-FFF2-40B4-BE49-F238E27FC236}">
@@ -14854,7 +15499,29 @@
                 <a:ea typeface="Calibri"/>
                 <a:cs typeface="Calibri"/>
               </a:rPr>
-              <a:t>Zs är felströmsslingans impedans. Dess belopp påverkar tillgänglig felström.</a:t>
+              <a:t>Z</a:t>
+            </a:r>
+            <a:r>
+              <a:rPr sz="2250" b="0" baseline="-25000">
+                <a:solidFill>
+                  <a:srgbClr val="111111"/>
+                </a:solidFill>
+                <a:latin typeface="Calibri"/>
+                <a:ea typeface="Calibri"/>
+                <a:cs typeface="Calibri"/>
+              </a:rPr>
+              <a:t>s</a:t>
+            </a:r>
+            <a:r>
+              <a:rPr sz="2250" b="0">
+                <a:solidFill>
+                  <a:srgbClr val="111111"/>
+                </a:solidFill>
+                <a:latin typeface="Calibri"/>
+                <a:ea typeface="Calibri"/>
+                <a:cs typeface="Calibri"/>
+              </a:rPr>
+              <a:t> är felströmsslingans impedans. Dess belopp påverkar tillgänglig felström.</a:t>
             </a:r>
           </a:p>
         </p:txBody>
@@ -16570,7 +17237,7 @@
         <p:spPr>
           <a:xfrm xmlns:a="http://schemas.openxmlformats.org/drawingml/2006/main">
             <a:off x="762000" y="1619250"/>
-            <a:ext cx="7620000" cy="1466850"/>
+            <a:ext cx="3977639" cy="1466850"/>
           </a:xfrm>
           <a:prstGeom xmlns:a="http://schemas.openxmlformats.org/drawingml/2006/main" prst="rect">
             <a:avLst/>
@@ -16598,7 +17265,7 @@
               </a:defRPr>
             </a:pPr>
             <a:r>
-              <a:rPr sz="2400" b="0">
+              <a:rPr sz="1800" b="0">
                 <a:solidFill>
                   <a:srgbClr val="111111"/>
                 </a:solidFill>
@@ -16622,7 +17289,7 @@
               </a:defRPr>
             </a:pPr>
             <a:r>
-              <a:rPr sz="2400" b="0">
+              <a:rPr sz="1800" b="0">
                 <a:solidFill>
                   <a:srgbClr val="111111"/>
                 </a:solidFill>
@@ -16652,7 +17319,7 @@
         <p:spPr>
           <a:xfrm xmlns:a="http://schemas.openxmlformats.org/drawingml/2006/main">
             <a:off x="762000" y="3200400"/>
-            <a:ext cx="7620000" cy="838200"/>
+            <a:ext cx="3977639" cy="838200"/>
           </a:xfrm>
           <a:prstGeom xmlns:a="http://schemas.openxmlformats.org/drawingml/2006/main" prst="rect">
             <a:avLst/>
@@ -16680,7 +17347,7 @@
               </a:defRPr>
             </a:pPr>
             <a:r>
-              <a:rPr sz="2925" b="1">
+              <a:rPr sz="2650" b="1">
                 <a:solidFill>
                   <a:srgbClr val="064F91"/>
                 </a:solidFill>
@@ -16710,7 +17377,7 @@
         <p:spPr>
           <a:xfrm xmlns:a="http://schemas.openxmlformats.org/drawingml/2006/main">
             <a:off x="762000" y="4429125"/>
-            <a:ext cx="7620000" cy="1352550"/>
+            <a:ext cx="3977639" cy="1352550"/>
           </a:xfrm>
           <a:prstGeom xmlns:a="http://schemas.openxmlformats.org/drawingml/2006/main" prst="rect">
             <a:avLst/>
@@ -16738,7 +17405,7 @@
               </a:defRPr>
             </a:pPr>
             <a:r>
-              <a:rPr sz="2250" b="0">
+              <a:rPr sz="1800" b="0">
                 <a:solidFill>
                   <a:srgbClr val="111111"/>
                 </a:solidFill>
@@ -16762,7 +17429,7 @@
               </a:defRPr>
             </a:pPr>
             <a:r>
-              <a:rPr sz="2250" b="0">
+              <a:rPr sz="1800" b="0">
                 <a:solidFill>
                   <a:srgbClr val="111111"/>
                 </a:solidFill>
@@ -16833,6 +17500,30 @@
           </a:p>
         </p:txBody>
       </p:sp>
+      <p:pic xmlns:a="http://schemas.openxmlformats.org/drawingml/2006/main" xmlns:r="http://schemas.openxmlformats.org/officeDocument/2006/relationships">
+        <p:nvPicPr>
+          <p:cNvPr id="9" name="Figur: TN-S-system: källan med L1, L2, L3, N oc" descr="TN-S-system: källan med L1, L2, L3, N och PE; ett fel mellan L1 och höljet ger en felslinga via PE tillbaka till källan"/>
+          <p:cNvPicPr>
+            <a:picLocks noChangeAspect="1"/>
+          </p:cNvPicPr>
+          <p:nvPr/>
+        </p:nvPicPr>
+        <p:blipFill>
+          <a:blip r:embed="rId3"/>
+          <a:stretch>
+            <a:fillRect/>
+          </a:stretch>
+        </p:blipFill>
+        <p:spPr>
+          <a:xfrm>
+            <a:off x="4892040" y="1645920"/>
+            <a:ext cx="3886200" cy="3252383"/>
+          </a:xfrm>
+          <a:prstGeom prst="rect">
+            <a:avLst/>
+          </a:prstGeom>
+        </p:spPr>
+      </p:pic>
     </p:spTree>
     <p:extLst>
       <p:ext uri="{BB962C8B-B14F-4D97-AF65-F5344CB8AC3E}">
@@ -16954,7 +17645,7 @@
         <p:spPr>
           <a:xfrm xmlns:a="http://schemas.openxmlformats.org/drawingml/2006/main">
             <a:off x="762000" y="1619250"/>
-            <a:ext cx="7620000" cy="1466850"/>
+            <a:ext cx="3977639" cy="1466850"/>
           </a:xfrm>
           <a:prstGeom xmlns:a="http://schemas.openxmlformats.org/drawingml/2006/main" prst="rect">
             <a:avLst/>
@@ -16982,7 +17673,7 @@
               </a:defRPr>
             </a:pPr>
             <a:r>
-              <a:rPr sz="2400" b="0">
+              <a:rPr sz="1800" b="0">
                 <a:solidFill>
                   <a:srgbClr val="111111"/>
                 </a:solidFill>
@@ -17006,7 +17697,7 @@
               </a:defRPr>
             </a:pPr>
             <a:r>
-              <a:rPr sz="2400" b="0">
+              <a:rPr sz="1800" b="0">
                 <a:solidFill>
                   <a:srgbClr val="111111"/>
                 </a:solidFill>
@@ -17036,7 +17727,7 @@
         <p:spPr>
           <a:xfrm xmlns:a="http://schemas.openxmlformats.org/drawingml/2006/main">
             <a:off x="762000" y="3200400"/>
-            <a:ext cx="7620000" cy="838200"/>
+            <a:ext cx="3977639" cy="838200"/>
           </a:xfrm>
           <a:prstGeom xmlns:a="http://schemas.openxmlformats.org/drawingml/2006/main" prst="rect">
             <a:avLst/>
@@ -17064,7 +17755,7 @@
               </a:defRPr>
             </a:pPr>
             <a:r>
-              <a:rPr sz="2925" b="1">
+              <a:rPr sz="2650" b="1">
                 <a:solidFill>
                   <a:srgbClr val="064F91"/>
                 </a:solidFill>
@@ -17094,7 +17785,7 @@
         <p:spPr>
           <a:xfrm xmlns:a="http://schemas.openxmlformats.org/drawingml/2006/main">
             <a:off x="762000" y="4429125"/>
-            <a:ext cx="7620000" cy="1352550"/>
+            <a:ext cx="3977639" cy="1352550"/>
           </a:xfrm>
           <a:prstGeom xmlns:a="http://schemas.openxmlformats.org/drawingml/2006/main" prst="rect">
             <a:avLst/>
@@ -17122,7 +17813,7 @@
               </a:defRPr>
             </a:pPr>
             <a:r>
-              <a:rPr sz="2250" b="0">
+              <a:rPr sz="2100" b="0">
                 <a:solidFill>
                   <a:srgbClr val="111111"/>
                 </a:solidFill>
@@ -17146,7 +17837,7 @@
               </a:defRPr>
             </a:pPr>
             <a:r>
-              <a:rPr sz="2250" b="0">
+              <a:rPr sz="2100" b="0">
                 <a:solidFill>
                   <a:srgbClr val="111111"/>
                 </a:solidFill>
@@ -17217,6 +17908,30 @@
           </a:p>
         </p:txBody>
       </p:sp>
+      <p:pic xmlns:a="http://schemas.openxmlformats.org/drawingml/2006/main" xmlns:r="http://schemas.openxmlformats.org/officeDocument/2006/relationships">
+        <p:nvPicPr>
+          <p:cNvPr id="9" name="Figur: TT-system: källans systemjord RB och ins" descr="TT-system: källans systemjord RB och installationens jordtag RA; felströmmen går genom jorden mellan jordtagen"/>
+          <p:cNvPicPr>
+            <a:picLocks noChangeAspect="1"/>
+          </p:cNvPicPr>
+          <p:nvPr/>
+        </p:nvPicPr>
+        <p:blipFill>
+          <a:blip r:embed="rId3"/>
+          <a:stretch>
+            <a:fillRect/>
+          </a:stretch>
+        </p:blipFill>
+        <p:spPr>
+          <a:xfrm>
+            <a:off x="4892040" y="1645920"/>
+            <a:ext cx="3886200" cy="3252383"/>
+          </a:xfrm>
+          <a:prstGeom prst="rect">
+            <a:avLst/>
+          </a:prstGeom>
+        </p:spPr>
+      </p:pic>
     </p:spTree>
     <p:extLst>
       <p:ext uri="{BB962C8B-B14F-4D97-AF65-F5344CB8AC3E}">

--- a/sjoskolan/vecka-44/aktuell/v44_01_Lagspanningssystem_elev.pptx
+++ b/sjoskolan/vecka-44/aktuell/v44_01_Lagspanningssystem_elev.pptx
@@ -9730,7 +9730,7 @@
                 <a:ea typeface="Calibri"/>
                 <a:cs typeface="Calibri"/>
               </a:rPr>
-              <a:t> fördubblas till 1,15 Ω blir Iₖ ≈ 230/1,15 = 200 A.</a:t>
+              <a:t> ökar till 2,3 Ω blir Iₖ ≈ 230/2,3 = 100 A.</a:t>
             </a:r>
           </a:p>
           <a:p xmlns:a="http://schemas.openxmlformats.org/drawingml/2006/main">
@@ -9907,7 +9907,7 @@
       </p:sp>
       <p:pic xmlns:a="http://schemas.openxmlformats.org/drawingml/2006/main" xmlns:r="http://schemas.openxmlformats.org/officeDocument/2006/relationships">
         <p:nvPicPr>
-          <p:cNvPr id="16" name="Figur: Felström som funktion av slingimpedans: " descr="Felström som funktion av slingimpedans: 0,575 ohm ger 400 A och 1,15 ohm ger 200 A"/>
+          <p:cNvPr id="16" name="Figur: Felström som funktion av slingimpedans: " descr="Felström som funktion av slingimpedans: 0,575 ohm ger 400 A och 2,3 ohm ger 100 A"/>
           <p:cNvPicPr>
             <a:picLocks noChangeAspect="1"/>
           </p:cNvPicPr>
@@ -11497,7 +11497,7 @@
                 <a:ea typeface="Calibri"/>
                 <a:cs typeface="Calibri"/>
               </a:rPr>
-              <a:t>Förenklad kortslutningsström</a:t>
+              <a:t>Förenklad felström</a:t>
             </a:r>
           </a:p>
         </p:txBody>
@@ -17813,15 +17813,15 @@
               </a:defRPr>
             </a:pPr>
             <a:r>
-              <a:rPr sz="2100" b="0">
-                <a:solidFill>
-                  <a:srgbClr val="111111"/>
-                </a:solidFill>
-                <a:latin typeface="Calibri"/>
-                <a:ea typeface="Calibri"/>
-                <a:cs typeface="Calibri"/>
-              </a:rPr>
-              <a:t>Jordtagsresistanser kan begränsa felströmmen så att</a:t>
+              <a:rPr sz="1700" b="0">
+                <a:solidFill>
+                  <a:srgbClr val="111111"/>
+                </a:solidFill>
+                <a:latin typeface="Calibri"/>
+                <a:ea typeface="Calibri"/>
+                <a:cs typeface="Calibri"/>
+              </a:rPr>
+              <a:t>Jordtagsresistanser kan begränsa felströmmen så att överströmsskydd ensamt inte ger avsedd bortkoppling.</a:t>
             </a:r>
           </a:p>
           <a:p xmlns:a="http://schemas.openxmlformats.org/drawingml/2006/main">
@@ -17837,15 +17837,15 @@
               </a:defRPr>
             </a:pPr>
             <a:r>
-              <a:rPr sz="2100" b="0">
-                <a:solidFill>
-                  <a:srgbClr val="111111"/>
-                </a:solidFill>
-                <a:latin typeface="Calibri"/>
-                <a:ea typeface="Calibri"/>
-                <a:cs typeface="Calibri"/>
-              </a:rPr>
-              <a:t>överströmsskydd ensamt inte ger avsedd bortkoppling.</a:t>
+              <a:rPr sz="1700" b="0">
+                <a:solidFill>
+                  <a:srgbClr val="111111"/>
+                </a:solidFill>
+                <a:latin typeface="Calibri"/>
+                <a:ea typeface="Calibri"/>
+                <a:cs typeface="Calibri"/>
+              </a:rPr>
+              <a:t>TT-system är ovanliga ombord.</a:t>
             </a:r>
           </a:p>
         </p:txBody>

--- a/sjoskolan/vecka-44/aktuell/v44_01_Lagspanningssystem_elev.pptx
+++ b/sjoskolan/vecka-44/aktuell/v44_01_Lagspanningssystem_elev.pptx
@@ -39,6 +39,7 @@
     <p:sldId id="287" r:id="Ra1f99114c2ba45fb"/>
     <p:sldId id="288" r:id="Raea60bec9e80424e"/>
     <p:sldId id="289" r:id="R3221c4f692594c06"/>
+    <p:sldId id="292" r:id="rId42"/>
     <p:sldId id="290" r:id="Rabf79db79473419f"/>
     <p:sldId id="291" r:id="R663ed1261eab4559"/>
   </p:sldIdLst>
@@ -3512,6 +3513,10 @@
             <a:noFill/>
           </a:ln>
         </p:spPr>
+        <p:txBody xmlns:a="http://schemas.openxmlformats.org/drawingml/2006/main">
+          <a:bodyPr/>
+          <a:p/>
+        </p:txBody>
       </p:sp>
       <p:sp>
         <p:nvSpPr>
@@ -14485,6 +14490,410 @@
 </file>
 
 <file path=ppt/slides/slide35.xml><?xml version="1.0" encoding="utf-8"?>
+<p:sld xmlns:a="http://schemas.openxmlformats.org/drawingml/2006/main" xmlns:p="http://schemas.openxmlformats.org/presentationml/2006/main" xmlns:r="http://schemas.openxmlformats.org/officeDocument/2006/relationships">
+  <p:cSld>
+    <p:spTree>
+      <p:nvGrpSpPr>
+        <p:cNvPr id="1" name=""/>
+        <p:cNvGrpSpPr/>
+        <p:nvPr/>
+      </p:nvGrpSpPr>
+      <p:grpSpPr/>
+      <p:pic>
+        <p:nvPicPr>
+          <p:cNvPr id="8" name="Bildobjekt 2"/>
+          <p:cNvPicPr>
+            <a:picLocks noChangeAspect="1"/>
+          </p:cNvPicPr>
+          <p:nvPr/>
+        </p:nvPicPr>
+        <p:blipFill>
+          <a:blip r:embed="rId2"/>
+          <a:stretch>
+            <a:fillRect l="0" t="0" r="0" b="0"/>
+          </a:stretch>
+        </p:blipFill>
+        <p:spPr>
+          <a:xfrm>
+            <a:off x="0" y="6098791"/>
+            <a:ext cx="9144006" cy="763524"/>
+          </a:xfrm>
+          <a:prstGeom prst="rect">
+            <a:avLst/>
+          </a:prstGeom>
+        </p:spPr>
+      </p:pic>
+      <p:sp>
+        <p:nvSpPr>
+          <p:cNvPr id="2" name="IT-system och övervakning">
+            <a:extLst>
+              <a:ext uri="{FF2B5EF4-FFF2-40B4-BE49-F238E27FC236}">
+                <a16:creationId xmlns:a16="http://schemas.microsoft.com/office/drawing/2014/main" id="{C7E7E6B1-61C4-4200-AEC9-14940ECDBF0E}"/>
+              </a:ext>
+            </a:extLst>
+          </p:cNvPr>
+          <p:cNvSpPr>
+            <a:spLocks noGrp="1"/>
+          </p:cNvSpPr>
+          <p:nvPr/>
+        </p:nvSpPr>
+        <p:spPr>
+          <a:xfrm>
+            <a:off x="428625" y="495300"/>
+            <a:ext cx="8286750" cy="1028700"/>
+          </a:xfrm>
+          <a:prstGeom prst="rect">
+            <a:avLst/>
+          </a:prstGeom>
+          <a:noFill/>
+          <a:ln w="0">
+            <a:noFill/>
+          </a:ln>
+        </p:spPr>
+        <p:txBody>
+          <a:bodyPr wrap="square" lIns="0" tIns="0" rIns="0" bIns="0" anchor="t">
+            <a:noAutofit/>
+          </a:bodyPr>
+          <a:lstStyle/>
+          <a:p>
+            <a:pPr algn="ctr">
+              <a:buNone/>
+              <a:defRPr sz="3600" b="1">
+                <a:solidFill>
+                  <a:srgbClr val="111111"/>
+                </a:solidFill>
+                <a:latin typeface="Calibri"/>
+                <a:ea typeface="Calibri"/>
+                <a:cs typeface="Calibri"/>
+              </a:defRPr>
+            </a:pPr>
+            <a:r>
+              <a:rPr sz="3600" b="1">
+                <a:solidFill>
+                  <a:srgbClr val="111111"/>
+                </a:solidFill>
+                <a:latin typeface="Calibri"/>
+                <a:ea typeface="Calibri"/>
+                <a:cs typeface="Calibri"/>
+              </a:rPr>
+              <a:t>Landanslutning ombord</a:t>
+            </a:r>
+          </a:p>
+        </p:txBody>
+      </p:sp>
+      <p:sp>
+        <p:nvSpPr>
+          <p:cNvPr id="3" name="Källan är isolerad från jord eller ansluten genom hög impedans.&#10;U">
+            <a:extLst>
+              <a:ext uri="{FF2B5EF4-FFF2-40B4-BE49-F238E27FC236}">
+                <a16:creationId xmlns:a16="http://schemas.microsoft.com/office/drawing/2014/main" id="{76729E63-4740-4961-BCC8-7D36CBD0DDF6}"/>
+              </a:ext>
+            </a:extLst>
+          </p:cNvPr>
+          <p:cNvSpPr>
+            <a:spLocks noGrp="1"/>
+          </p:cNvSpPr>
+          <p:nvPr/>
+        </p:nvSpPr>
+        <p:spPr>
+          <a:xfrm>
+            <a:off x="762000" y="1619250"/>
+            <a:ext cx="3977639" cy="1466850"/>
+          </a:xfrm>
+          <a:prstGeom prst="rect">
+            <a:avLst/>
+          </a:prstGeom>
+          <a:noFill/>
+          <a:ln w="0">
+            <a:noFill/>
+          </a:ln>
+        </p:spPr>
+        <p:txBody>
+          <a:bodyPr wrap="square" lIns="0" tIns="0" rIns="0" bIns="0" anchor="t">
+            <a:noAutofit/>
+          </a:bodyPr>
+          <a:lstStyle/>
+          <a:p>
+            <a:pPr algn="l">
+              <a:buNone/>
+              <a:defRPr sz="2400" b="0">
+                <a:solidFill>
+                  <a:srgbClr val="111111"/>
+                </a:solidFill>
+                <a:latin typeface="Calibri"/>
+                <a:ea typeface="Calibri"/>
+                <a:cs typeface="Calibri"/>
+              </a:defRPr>
+            </a:pPr>
+            <a:r>
+              <a:rPr sz="1800" b="0">
+                <a:solidFill>
+                  <a:srgbClr val="111111"/>
+                </a:solidFill>
+                <a:latin typeface="Calibri"/>
+                <a:ea typeface="Calibri"/>
+                <a:cs typeface="Calibri"/>
+              </a:rPr>
+              <a:t>Landström är ofta 400 V/50 Hz, fartygets nät ofta 440 V/60 Hz.</a:t>
+            </a:r>
+          </a:p>
+          <a:p>
+            <a:pPr algn="l">
+              <a:buNone/>
+              <a:defRPr sz="2400" b="0">
+                <a:solidFill>
+                  <a:srgbClr val="111111"/>
+                </a:solidFill>
+                <a:latin typeface="Calibri"/>
+                <a:ea typeface="Calibri"/>
+                <a:cs typeface="Calibri"/>
+              </a:defRPr>
+            </a:pPr>
+            <a:r>
+              <a:rPr sz="1800" b="0">
+                <a:solidFill>
+                  <a:srgbClr val="111111"/>
+                </a:solidFill>
+                <a:latin typeface="Calibri"/>
+                <a:ea typeface="Calibri"/>
+                <a:cs typeface="Calibri"/>
+              </a:rPr>
+              <a:t>Spänning och frekvens måste passa innan laster kopplas in.</a:t>
+            </a:r>
+          </a:p>
+        </p:txBody>
+      </p:sp>
+      <p:sp>
+        <p:nvSpPr>
+          <p:cNvPr id="4" name="Första isolationsfelet ska upptäckas och hanteras">
+            <a:extLst>
+              <a:ext uri="{FF2B5EF4-FFF2-40B4-BE49-F238E27FC236}">
+                <a16:creationId xmlns:a16="http://schemas.microsoft.com/office/drawing/2014/main" id="{47EEA20A-D908-4B5C-B38C-5C6CB5F022B9}"/>
+              </a:ext>
+            </a:extLst>
+          </p:cNvPr>
+          <p:cNvSpPr>
+            <a:spLocks noGrp="1"/>
+          </p:cNvSpPr>
+          <p:nvPr/>
+        </p:nvSpPr>
+        <p:spPr>
+          <a:xfrm>
+            <a:off x="762000" y="3200400"/>
+            <a:ext cx="3977639" cy="838200"/>
+          </a:xfrm>
+          <a:prstGeom prst="rect">
+            <a:avLst/>
+          </a:prstGeom>
+          <a:noFill/>
+          <a:ln w="0">
+            <a:noFill/>
+          </a:ln>
+        </p:spPr>
+        <p:txBody>
+          <a:bodyPr wrap="square" lIns="0" tIns="0" rIns="0" bIns="0" anchor="t">
+            <a:noAutofit/>
+          </a:bodyPr>
+          <a:lstStyle/>
+          <a:p>
+            <a:pPr algn="l">
+              <a:buNone/>
+              <a:defRPr sz="2925" b="1">
+                <a:solidFill>
+                  <a:srgbClr val="064F91"/>
+                </a:solidFill>
+                <a:latin typeface="Calibri"/>
+                <a:ea typeface="Calibri"/>
+                <a:cs typeface="Calibri"/>
+              </a:defRPr>
+            </a:pPr>
+            <a:r>
+              <a:rPr sz="2650" b="1">
+                <a:solidFill>
+                  <a:srgbClr val="064F91"/>
+                </a:solidFill>
+                <a:latin typeface="Calibri"/>
+                <a:ea typeface="Calibri"/>
+                <a:cs typeface="Calibri"/>
+              </a:rPr>
+              <a:t>Kontrollera före inkoppling</a:t>
+            </a:r>
+          </a:p>
+        </p:txBody>
+      </p:sp>
+      <p:sp>
+        <p:nvSpPr>
+          <p:cNvPr id="5" name="Isolationsövervakningen ger information om försämrad isolation.&#10;F">
+            <a:extLst>
+              <a:ext uri="{FF2B5EF4-FFF2-40B4-BE49-F238E27FC236}">
+                <a16:creationId xmlns:a16="http://schemas.microsoft.com/office/drawing/2014/main" id="{1BD24B2F-29BE-40AE-95FF-138345517B14}"/>
+              </a:ext>
+            </a:extLst>
+          </p:cNvPr>
+          <p:cNvSpPr>
+            <a:spLocks noGrp="1"/>
+          </p:cNvSpPr>
+          <p:nvPr/>
+        </p:nvSpPr>
+        <p:spPr>
+          <a:xfrm>
+            <a:off x="762000" y="4429125"/>
+            <a:ext cx="3977639" cy="1352550"/>
+          </a:xfrm>
+          <a:prstGeom prst="rect">
+            <a:avLst/>
+          </a:prstGeom>
+          <a:noFill/>
+          <a:ln w="0">
+            <a:noFill/>
+          </a:ln>
+        </p:spPr>
+        <p:txBody>
+          <a:bodyPr wrap="square" lIns="0" tIns="0" rIns="0" bIns="0" anchor="t">
+            <a:noAutofit/>
+          </a:bodyPr>
+          <a:lstStyle/>
+          <a:p>
+            <a:pPr algn="l">
+              <a:buNone/>
+              <a:defRPr sz="2250" b="0">
+                <a:solidFill>
+                  <a:srgbClr val="111111"/>
+                </a:solidFill>
+                <a:latin typeface="Calibri"/>
+                <a:ea typeface="Calibri"/>
+                <a:cs typeface="Calibri"/>
+              </a:defRPr>
+            </a:pPr>
+            <a:r>
+              <a:rPr sz="1550" b="0">
+                <a:solidFill>
+                  <a:srgbClr val="111111"/>
+                </a:solidFill>
+                <a:latin typeface="Calibri"/>
+                <a:ea typeface="Calibri"/>
+                <a:cs typeface="Calibri"/>
+              </a:rPr>
+              <a:t>Fasföljd, spänning och frekvens. Skyddsjord och potentialutjämning ansluts först.</a:t>
+            </a:r>
+          </a:p>
+          <a:p>
+            <a:pPr algn="l">
+              <a:buNone/>
+              <a:defRPr sz="2250" b="0">
+                <a:solidFill>
+                  <a:srgbClr val="111111"/>
+                </a:solidFill>
+                <a:latin typeface="Calibri"/>
+                <a:ea typeface="Calibri"/>
+                <a:cs typeface="Calibri"/>
+              </a:defRPr>
+            </a:pPr>
+            <a:r>
+              <a:rPr sz="1550" b="0">
+                <a:solidFill>
+                  <a:srgbClr val="111111"/>
+                </a:solidFill>
+                <a:latin typeface="Calibri"/>
+                <a:ea typeface="Calibri"/>
+                <a:cs typeface="Calibri"/>
+              </a:rPr>
+              <a:t>Förregling mot generatordrift. Landnätets jordning kan skilja sig från fartygets. HV-landström: IEC/IEEE 80005-1.</a:t>
+            </a:r>
+          </a:p>
+        </p:txBody>
+      </p:sp>
+      <p:sp>
+        <p:nvSpPr>
+          <p:cNvPr id="6" name="13">
+            <a:extLst>
+              <a:ext uri="{FF2B5EF4-FFF2-40B4-BE49-F238E27FC236}">
+                <a16:creationId xmlns:a16="http://schemas.microsoft.com/office/drawing/2014/main" id="{BC7F4313-DFDD-4731-8977-839802307A6C}"/>
+              </a:ext>
+            </a:extLst>
+          </p:cNvPr>
+          <p:cNvSpPr>
+            <a:spLocks noGrp="1"/>
+          </p:cNvSpPr>
+          <p:nvPr/>
+        </p:nvSpPr>
+        <p:spPr>
+          <a:xfrm>
+            <a:off x="8191500" y="6438900"/>
+            <a:ext cx="523875" cy="285750"/>
+          </a:xfrm>
+          <a:prstGeom prst="rect">
+            <a:avLst/>
+          </a:prstGeom>
+          <a:noFill/>
+          <a:ln w="0">
+            <a:noFill/>
+          </a:ln>
+        </p:spPr>
+        <p:txBody>
+          <a:bodyPr wrap="square" lIns="0" tIns="0" rIns="0" bIns="0" anchor="t">
+            <a:noAutofit/>
+          </a:bodyPr>
+          <a:lstStyle/>
+          <a:p>
+            <a:pPr algn="r">
+              <a:buNone/>
+              <a:defRPr sz="1500" b="0">
+                <a:solidFill>
+                  <a:srgbClr val="FFFFFF"/>
+                </a:solidFill>
+                <a:latin typeface="Calibri"/>
+                <a:ea typeface="Calibri"/>
+                <a:cs typeface="Calibri"/>
+              </a:defRPr>
+            </a:pPr>
+            <a:r>
+              <a:rPr sz="1500" b="0">
+                <a:solidFill>
+                  <a:srgbClr val="FFFFFF"/>
+                </a:solidFill>
+                <a:latin typeface="Calibri"/>
+                <a:ea typeface="Calibri"/>
+                <a:cs typeface="Calibri"/>
+              </a:rPr>
+              <a:t>35</a:t>
+            </a:r>
+          </a:p>
+        </p:txBody>
+      </p:sp>
+      <p:pic>
+        <p:nvPicPr>
+          <p:cNvPr id="9" name="Figur: Landanslutning: landström 400 V 50 Hz gå" descr="Landanslutning: landström 400 V 50 Hz går via anpassning av spänning och frekvens till huvudtavlan 440 V 60 Hz; skyddsjord och potentialutjämning ansluts först; förregling mot generatorerna"/>
+          <p:cNvPicPr>
+            <a:picLocks noChangeAspect="1"/>
+          </p:cNvPicPr>
+          <p:nvPr/>
+        </p:nvPicPr>
+        <p:blipFill>
+          <a:blip r:embed="rId3"/>
+          <a:stretch>
+            <a:fillRect/>
+          </a:stretch>
+        </p:blipFill>
+        <p:spPr>
+          <a:xfrm>
+            <a:off x="4892040" y="1645920"/>
+            <a:ext cx="3886200" cy="3071293"/>
+          </a:xfrm>
+          <a:prstGeom prst="rect">
+            <a:avLst/>
+          </a:prstGeom>
+        </p:spPr>
+      </p:pic>
+    </p:spTree>
+  </p:cSld>
+  <p:clrMapOvr>
+    <a:masterClrMapping/>
+  </p:clrMapOvr>
+</p:sld>
+</file>
+
+<file path=ppt/slides/slide36.xml><?xml version="1.0" encoding="utf-8"?>
 <p:sld xmlns:p="http://schemas.openxmlformats.org/presentationml/2006/main">
   <p:cSld>
     <p:spTree>
@@ -14747,7 +15156,7 @@
                 <a:ea typeface="Calibri"/>
                 <a:cs typeface="Calibri"/>
               </a:rPr>
-              <a:t>35</a:t>
+              <a:t>36</a:t>
             </a:r>
           </a:p>
         </p:txBody>
@@ -14762,7 +15171,7 @@
 </p:sld>
 </file>
 
-<file path=ppt/slides/slide36.xml><?xml version="1.0" encoding="utf-8"?>
+<file path=ppt/slides/slide37.xml><?xml version="1.0" encoding="utf-8"?>
 <p:sld xmlns:p="http://schemas.openxmlformats.org/presentationml/2006/main">
   <p:cSld>
     <p:spTree>
@@ -15168,7 +15577,7 @@
                 <a:ea typeface="Calibri"/>
                 <a:cs typeface="Calibri"/>
               </a:rPr>
-              <a:t>36</a:t>
+              <a:t>37</a:t>
             </a:r>
           </a:p>
         </p:txBody>
@@ -16325,6 +16734,10 @@
             </a:solidFill>
           </a:ln>
         </p:spPr>
+        <p:txBody xmlns:a="http://schemas.openxmlformats.org/drawingml/2006/main">
+          <a:bodyPr/>
+          <a:p/>
+        </p:txBody>
       </p:sp>
       <p:sp>
         <p:nvSpPr>
@@ -16413,6 +16826,10 @@
             </a:solidFill>
           </a:ln>
         </p:spPr>
+        <p:txBody xmlns:a="http://schemas.openxmlformats.org/drawingml/2006/main">
+          <a:bodyPr/>
+          <a:p/>
+        </p:txBody>
       </p:sp>
       <p:sp>
         <p:nvSpPr>
@@ -16445,6 +16862,10 @@
             </a:solidFill>
           </a:ln>
         </p:spPr>
+        <p:txBody xmlns:a="http://schemas.openxmlformats.org/drawingml/2006/main">
+          <a:bodyPr/>
+          <a:p/>
+        </p:txBody>
       </p:sp>
       <p:sp>
         <p:nvSpPr>
@@ -16533,6 +16954,10 @@
             </a:solidFill>
           </a:ln>
         </p:spPr>
+        <p:txBody xmlns:a="http://schemas.openxmlformats.org/drawingml/2006/main">
+          <a:bodyPr/>
+          <a:p/>
+        </p:txBody>
       </p:sp>
       <p:sp>
         <p:nvSpPr>
@@ -16565,6 +16990,10 @@
             </a:solidFill>
           </a:ln>
         </p:spPr>
+        <p:txBody xmlns:a="http://schemas.openxmlformats.org/drawingml/2006/main">
+          <a:bodyPr/>
+          <a:p/>
+        </p:txBody>
       </p:sp>
       <p:sp>
         <p:nvSpPr>
@@ -16653,6 +17082,10 @@
             </a:solidFill>
           </a:ln>
         </p:spPr>
+        <p:txBody xmlns:a="http://schemas.openxmlformats.org/drawingml/2006/main">
+          <a:bodyPr/>
+          <a:p/>
+        </p:txBody>
       </p:sp>
       <p:sp>
         <p:nvSpPr>
@@ -16685,6 +17118,10 @@
             </a:solidFill>
           </a:ln>
         </p:spPr>
+        <p:txBody xmlns:a="http://schemas.openxmlformats.org/drawingml/2006/main">
+          <a:bodyPr/>
+          <a:p/>
+        </p:txBody>
       </p:sp>
       <p:sp>
         <p:nvSpPr>

--- a/sjoskolan/vecka-44/aktuell/v44_01_Lagspanningssystem_elev.pptx
+++ b/sjoskolan/vecka-44/aktuell/v44_01_Lagspanningssystem_elev.pptx
@@ -3961,7 +3961,7 @@
                 <a:ea typeface="Calibri"/>
                 <a:cs typeface="Calibri"/>
               </a:rPr>
-              <a:t>Förutsättningar: Frågan gäller TN-S. Andra system får inte antas ha samma uppbyggnad.</a:t>
+              <a:t>Förutsättningar: Frågan gäller TN-S. Andra system kan vara uppbyggda på annat sätt.</a:t>
             </a:r>
           </a:p>
         </p:txBody>
@@ -4571,51 +4571,7 @@
                 <a:ea typeface="Calibri"/>
                 <a:cs typeface="Calibri"/>
               </a:rPr>
-              <a:t>I</a:t>
-            </a:r>
-            <a:r>
-              <a:rPr sz="2400" b="1" baseline="-25000">
-                <a:solidFill>
-                  <a:srgbClr val="064F91"/>
-                </a:solidFill>
-                <a:latin typeface="Calibri"/>
-                <a:ea typeface="Calibri"/>
-                <a:cs typeface="Calibri"/>
-              </a:rPr>
-              <a:t>fel</a:t>
-            </a:r>
-            <a:r>
-              <a:rPr sz="2400" b="1">
-                <a:solidFill>
-                  <a:srgbClr val="064F91"/>
-                </a:solidFill>
-                <a:latin typeface="Calibri"/>
-                <a:ea typeface="Calibri"/>
-                <a:cs typeface="Calibri"/>
-              </a:rPr>
-              <a:t> ≈ U/</a:t>
-            </a:r>
-            <a:r>
-              <a:rPr sz="2400" b="1">
-                <a:solidFill>
-                  <a:srgbClr val="064F91"/>
-                </a:solidFill>
-                <a:latin typeface="Calibri"/>
-                <a:ea typeface="Calibri"/>
-                <a:cs typeface="Calibri"/>
-              </a:rPr>
-              <a:t>Z</a:t>
-            </a:r>
-            <a:r>
-              <a:rPr sz="2400" b="1" baseline="-25000">
-                <a:solidFill>
-                  <a:srgbClr val="064F91"/>
-                </a:solidFill>
-                <a:latin typeface="Calibri"/>
-                <a:ea typeface="Calibri"/>
-                <a:cs typeface="Calibri"/>
-              </a:rPr>
-              <a:t>fel</a:t>
+              <a:t>Ifel ≈ U/Zfel</a:t>
             </a:r>
           </a:p>
         </p:txBody>
@@ -4672,7 +4628,7 @@
                 <a:ea typeface="Calibri"/>
                 <a:cs typeface="Calibri"/>
               </a:rPr>
-              <a:t>Hög impedans i jordfelsslingan begränsar strömmen. Ett överströmsskydd kan då sakna tillräcklig utlösningsström.</a:t>
+              <a:t>Hög impedans i felslingan begränsar strömmen, så den kanske inte räcker för att ett överströmsskydd ska lösa ut.</a:t>
             </a:r>
           </a:p>
         </p:txBody>
@@ -4729,7 +4685,7 @@
                 <a:ea typeface="Calibri"/>
                 <a:cs typeface="Calibri"/>
               </a:rPr>
-              <a:t>Förutsättningar: TT-system med jordningsväg genom separata jordtag. Jordfelsfunktionen kan upptäcka differensström.</a:t>
+              <a:t>Förutsättningar: TT-system där felströmmen går genom två separata jordtag. Jordfelsbrytaren känner av differensström.</a:t>
             </a:r>
           </a:p>
         </p:txBody>
@@ -4786,7 +4742,7 @@
                 <a:ea typeface="Calibri"/>
                 <a:cs typeface="Calibri"/>
               </a:rPr>
-              <a:t>Arbetsgång: Förklara varför felström och skyddets utlösning måste jämföras, och vad jordfelsfunktionen tillför.</a:t>
+              <a:t>Arbetsgång: Förklara varför felströmmen måste jämföras med skyddets utlösningsström och vad jordfelsbrytaren tillför.</a:t>
             </a:r>
           </a:p>
         </p:txBody>
@@ -5063,7 +5019,7 @@
                 <a:ea typeface="Calibri"/>
                 <a:cs typeface="Calibri"/>
               </a:rPr>
-              <a:t>Varför är jordfelsbrytare ofta avgörande för felbortkoppling i TT-system?</a:t>
+              <a:t>Varför är det ofta jordfelsbrytaren som måste koppla bort ett fel i ett TT-system?</a:t>
             </a:r>
           </a:p>
         </p:txBody>
@@ -5396,7 +5352,7 @@
                 <a:ea typeface="Calibri"/>
                 <a:cs typeface="Calibri"/>
               </a:rPr>
-              <a:t>Aktiva ledare är isolerade från jord eller anslutna via hög impedans. Utsatta delar har skyddsförbindelse.</a:t>
+              <a:t>Fasledarna är isolerade från jord eller anslutna via en hög impedans, och utsatta delar är skyddsjordade.</a:t>
             </a:r>
           </a:p>
         </p:txBody>
@@ -5453,7 +5409,7 @@
                 <a:ea typeface="Calibri"/>
                 <a:cs typeface="Calibri"/>
               </a:rPr>
-              <a:t>Förutsättningar: Principfråga om isolationsövervakningsdon. Ingen viss larmgräns anges.</a:t>
+              <a:t>Förutsättningar: En principfråga. Ingen larmgräns anges.</a:t>
             </a:r>
           </a:p>
         </p:txBody>
@@ -5510,7 +5466,7 @@
                 <a:ea typeface="Calibri"/>
                 <a:cs typeface="Calibri"/>
               </a:rPr>
-              <a:t>Arbetsgång: Ange vad donet övervakar och varför en försämring ska uppmärksammas.</a:t>
+              <a:t>Arbetsgång: Ange vad isolationsvakten mäter och varför en försämring måste tas på allvar.</a:t>
             </a:r>
           </a:p>
         </p:txBody>
@@ -5787,7 +5743,7 @@
                 <a:ea typeface="Calibri"/>
                 <a:cs typeface="Calibri"/>
               </a:rPr>
-              <a:t>Vad övervakar ett isolationsövervakningsdon i ett IT-system på principiell nivå?</a:t>
+              <a:t>Vad övervakar isolationsvakten i ett IT-system, i princip?</a:t>
             </a:r>
           </a:p>
         </p:txBody>
@@ -6120,7 +6076,7 @@
                 <a:ea typeface="Calibri"/>
                 <a:cs typeface="Calibri"/>
               </a:rPr>
-              <a:t>Första fel kan ge liten ström i ett korrekt utformat IT-system. Ett andra fel på annan ledare kan bli allvarligt.</a:t>
+              <a:t>I ett rätt byggt IT-system ger det första felet bara en liten ström, men ett andra fel på en annan ledare kan bli allvarligt.</a:t>
             </a:r>
           </a:p>
         </p:txBody>
@@ -6177,7 +6133,7 @@
                 <a:ea typeface="Calibri"/>
                 <a:cs typeface="Calibri"/>
               </a:rPr>
-              <a:t>Förutsättningar: Isolationslarm föreligger, men lasten fungerar. Fortsatt drift beror på systemets skydd och rutiner.</a:t>
+              <a:t>Förutsättningar: Isolationslarmet är aktivt, men lasten fungerar. Om driften får fortsätta beror på systemets skydd och rutiner.</a:t>
             </a:r>
           </a:p>
         </p:txBody>
@@ -6234,7 +6190,7 @@
                 <a:ea typeface="Calibri"/>
                 <a:cs typeface="Calibri"/>
               </a:rPr>
-              <a:t>Arbetsgång: Förklara varför fungerande last inte betyder felfri isolation. Ange behov av felhantering.</a:t>
+              <a:t>Arbetsgång: Förklara varför en last som fungerar inte betyder att isolationen är hel, och vad som behöver göras.</a:t>
             </a:r>
           </a:p>
         </p:txBody>
@@ -6844,7 +6800,7 @@
                 <a:ea typeface="Calibri"/>
                 <a:cs typeface="Calibri"/>
               </a:rPr>
-              <a:t>Olika delnät kan ha olika relation till jord, olika skydd och olika matningskällor.</a:t>
+              <a:t>Olika delnät kan vara jordade på olika sätt och ha olika skydd och källor.</a:t>
             </a:r>
           </a:p>
         </p:txBody>
@@ -6901,7 +6857,7 @@
                 <a:ea typeface="Calibri"/>
                 <a:cs typeface="Calibri"/>
               </a:rPr>
-              <a:t>Förutsättningar: Fartyget har flera transformatorer och delnät. Enlinjeschema saknas i frågan.</a:t>
+              <a:t>Förutsättningar: Fartyget har flera transformatorer och delnät. Det finns inget enlinjeschema.</a:t>
             </a:r>
           </a:p>
         </p:txBody>
@@ -6958,7 +6914,7 @@
                 <a:ea typeface="Calibri"/>
                 <a:cs typeface="Calibri"/>
               </a:rPr>
-              <a:t>Arbetsgång: Ange vilket underlag som behövs för att klassificera varje del. Undvik att anta ett system för hela fartyget.</a:t>
+              <a:t>Arbetsgång: Ange vilket underlag du behöver för att avgöra jordningssystemet för varje del.</a:t>
             </a:r>
           </a:p>
         </p:txBody>
@@ -7235,7 +7191,7 @@
                 <a:ea typeface="Calibri"/>
                 <a:cs typeface="Calibri"/>
               </a:rPr>
-              <a:t>Ett fartyg har flera transformatorer och delnät. Kan hela fartyget klassas som ett enda jordningssystem utan schema?</a:t>
+              <a:t>Ett fartyg har flera transformatorer och delnät. Kan man utan schema säga att hela fartyget har ett och samma jordningssystem?</a:t>
             </a:r>
           </a:p>
         </p:txBody>
@@ -10089,7 +10045,18 @@
                 <a:ea typeface="Calibri"/>
                 <a:cs typeface="Calibri"/>
               </a:rPr>
-              <a:t>ΔU = I · </a:t>
+              <a:t>ΔU = I · R</a:t>
+            </a:r>
+            <a:r>
+              <a:rPr sz="2400" b="1" baseline="-25000">
+                <a:solidFill>
+                  <a:srgbClr val="064F91"/>
+                </a:solidFill>
+                <a:latin typeface="Calibri"/>
+                <a:ea typeface="Calibri"/>
+                <a:cs typeface="Calibri"/>
+              </a:rPr>
+              <a:t>slinga</a:t>
             </a:r>
             <a:r>
               <a:rPr sz="2400" b="1">
@@ -10100,7 +10067,7 @@
                 <a:ea typeface="Calibri"/>
                 <a:cs typeface="Calibri"/>
               </a:rPr>
-              <a:t>R</a:t>
+              <a:t>; U</a:t>
             </a:r>
             <a:r>
               <a:rPr sz="2400" b="1" baseline="-25000">
@@ -10111,7 +10078,7 @@
                 <a:ea typeface="Calibri"/>
                 <a:cs typeface="Calibri"/>
               </a:rPr>
-              <a:t>slinga</a:t>
+              <a:t>last</a:t>
             </a:r>
             <a:r>
               <a:rPr sz="2400" b="1">
@@ -10122,51 +10089,7 @@
                 <a:ea typeface="Calibri"/>
                 <a:cs typeface="Calibri"/>
               </a:rPr>
-              <a:t>     </a:t>
-            </a:r>
-            <a:r>
-              <a:rPr sz="2400" b="1">
-                <a:solidFill>
-                  <a:srgbClr val="064F91"/>
-                </a:solidFill>
-                <a:latin typeface="Calibri"/>
-                <a:ea typeface="Calibri"/>
-                <a:cs typeface="Calibri"/>
-              </a:rPr>
-              <a:t>U</a:t>
-            </a:r>
-            <a:r>
-              <a:rPr sz="2400" b="1" baseline="-25000">
-                <a:solidFill>
-                  <a:srgbClr val="064F91"/>
-                </a:solidFill>
-                <a:latin typeface="Calibri"/>
-                <a:ea typeface="Calibri"/>
-                <a:cs typeface="Calibri"/>
-              </a:rPr>
-              <a:t>last</a:t>
-            </a:r>
-            <a:r>
-              <a:rPr sz="2400" b="1">
-                <a:solidFill>
-                  <a:srgbClr val="064F91"/>
-                </a:solidFill>
-                <a:latin typeface="Calibri"/>
-                <a:ea typeface="Calibri"/>
-                <a:cs typeface="Calibri"/>
-              </a:rPr>
-              <a:t> = </a:t>
-            </a:r>
-            <a:r>
-              <a:rPr sz="2400" b="1">
-                <a:solidFill>
-                  <a:srgbClr val="064F91"/>
-                </a:solidFill>
-                <a:latin typeface="Calibri"/>
-                <a:ea typeface="Calibri"/>
-                <a:cs typeface="Calibri"/>
-              </a:rPr>
-              <a:t>U</a:t>
+              <a:t> = U</a:t>
             </a:r>
             <a:r>
               <a:rPr sz="2400" b="1" baseline="-25000">
@@ -10267,7 +10190,7 @@
                 <a:ea typeface="Calibri"/>
                 <a:cs typeface="Calibri"/>
               </a:rPr>
-              <a:t> omfattar både fram- och returväg. U och ΔU anges i V, I i A och R i Ω.</a:t>
+              <a:t> gäller både fram- och returledaren.</a:t>
             </a:r>
           </a:p>
         </p:txBody>
@@ -10324,7 +10247,18 @@
                 <a:ea typeface="Calibri"/>
                 <a:cs typeface="Calibri"/>
               </a:rPr>
-              <a:t>Förutsättningar: Konstant DC: </a:t>
+              <a:t>Förutsättningar: Likspänning: U</a:t>
+            </a:r>
+            <a:r>
+              <a:rPr sz="2025" b="0" baseline="-25000">
+                <a:solidFill>
+                  <a:srgbClr val="111111"/>
+                </a:solidFill>
+                <a:latin typeface="Calibri"/>
+                <a:ea typeface="Calibri"/>
+                <a:cs typeface="Calibri"/>
+              </a:rPr>
+              <a:t>källa</a:t>
             </a:r>
             <a:r>
               <a:rPr sz="2025" b="0">
@@ -10335,40 +10269,7 @@
                 <a:ea typeface="Calibri"/>
                 <a:cs typeface="Calibri"/>
               </a:rPr>
-              <a:t>U</a:t>
-            </a:r>
-            <a:r>
-              <a:rPr sz="2025" b="0" baseline="-25000">
-                <a:solidFill>
-                  <a:srgbClr val="111111"/>
-                </a:solidFill>
-                <a:latin typeface="Calibri"/>
-                <a:ea typeface="Calibri"/>
-                <a:cs typeface="Calibri"/>
-              </a:rPr>
-              <a:t>källa</a:t>
-            </a:r>
-            <a:r>
-              <a:rPr sz="2025" b="0">
-                <a:solidFill>
-                  <a:srgbClr val="111111"/>
-                </a:solidFill>
-                <a:latin typeface="Calibri"/>
-                <a:ea typeface="Calibri"/>
-                <a:cs typeface="Calibri"/>
-              </a:rPr>
-              <a:t> = 24 V, I = 6 A, </a:t>
-            </a:r>
-            <a:r>
-              <a:rPr sz="2025" b="0">
-                <a:solidFill>
-                  <a:srgbClr val="111111"/>
-                </a:solidFill>
-                <a:latin typeface="Calibri"/>
-                <a:ea typeface="Calibri"/>
-                <a:cs typeface="Calibri"/>
-              </a:rPr>
-              <a:t>R</a:t>
+              <a:t> = 24 V, I = 6 A, R</a:t>
             </a:r>
             <a:r>
               <a:rPr sz="2025" b="0" baseline="-25000">
@@ -10447,7 +10348,7 @@
                 <a:ea typeface="Calibri"/>
                 <a:cs typeface="Calibri"/>
               </a:rPr>
-              <a:t>Arbetsgång: Beräkna fallet i slingan och subtrahera det från källspänningen.</a:t>
+              <a:t>Arbetsgång: Räkna ut spänningsfallet och dra det från källans spänning.</a:t>
             </a:r>
           </a:p>
         </p:txBody>
@@ -11024,7 +10925,18 @@
                 <a:ea typeface="Calibri"/>
                 <a:cs typeface="Calibri"/>
               </a:rPr>
-              <a:t>Iₖ ≈ U₀/</a:t>
+              <a:t>I</a:t>
+            </a:r>
+            <a:r>
+              <a:rPr sz="2400" b="1" baseline="-25000">
+                <a:solidFill>
+                  <a:srgbClr val="064F91"/>
+                </a:solidFill>
+                <a:latin typeface="Calibri"/>
+                <a:ea typeface="Calibri"/>
+                <a:cs typeface="Calibri"/>
+              </a:rPr>
+              <a:t>k</a:t>
             </a:r>
             <a:r>
               <a:rPr sz="2400" b="1">
@@ -11035,7 +10947,7 @@
                 <a:ea typeface="Calibri"/>
                 <a:cs typeface="Calibri"/>
               </a:rPr>
-              <a:t>Z</a:t>
+              <a:t> ≈ U</a:t>
             </a:r>
             <a:r>
               <a:rPr sz="2400" b="1" baseline="-25000">
@@ -11046,7 +10958,18 @@
                 <a:ea typeface="Calibri"/>
                 <a:cs typeface="Calibri"/>
               </a:rPr>
-              <a:t>s</a:t>
+              <a:t>0</a:t>
+            </a:r>
+            <a:r>
+              <a:rPr sz="2400" b="1">
+                <a:solidFill>
+                  <a:srgbClr val="064F91"/>
+                </a:solidFill>
+                <a:latin typeface="Calibri"/>
+                <a:ea typeface="Calibri"/>
+                <a:cs typeface="Calibri"/>
+              </a:rPr>
+              <a:t>/Zs</a:t>
             </a:r>
           </a:p>
         </p:txBody>
@@ -11103,7 +11026,18 @@
                 <a:ea typeface="Calibri"/>
                 <a:cs typeface="Calibri"/>
               </a:rPr>
-              <a:t>Iₖ är beräknad felström, U₀ drivande spänning och </a:t>
+              <a:t>I</a:t>
+            </a:r>
+            <a:r>
+              <a:rPr sz="2100" b="0" baseline="-25000">
+                <a:solidFill>
+                  <a:srgbClr val="111111"/>
+                </a:solidFill>
+                <a:latin typeface="Calibri"/>
+                <a:ea typeface="Calibri"/>
+                <a:cs typeface="Calibri"/>
+              </a:rPr>
+              <a:t>k</a:t>
             </a:r>
             <a:r>
               <a:rPr sz="2100" b="0">
@@ -11114,7 +11048,7 @@
                 <a:ea typeface="Calibri"/>
                 <a:cs typeface="Calibri"/>
               </a:rPr>
-              <a:t>Z</a:t>
+              <a:t> är felströmmen, U</a:t>
             </a:r>
             <a:r>
               <a:rPr sz="2100" b="0" baseline="-25000">
@@ -11125,7 +11059,7 @@
                 <a:ea typeface="Calibri"/>
                 <a:cs typeface="Calibri"/>
               </a:rPr>
-              <a:t>s</a:t>
+              <a:t>0</a:t>
             </a:r>
             <a:r>
               <a:rPr sz="2100" b="0">
@@ -11136,7 +11070,7 @@
                 <a:ea typeface="Calibri"/>
                 <a:cs typeface="Calibri"/>
               </a:rPr>
-              <a:t> hela felströmsslingans impedansbelopp.</a:t>
+              <a:t> den drivande spänningen och Zs impedansen i hela felslingan.</a:t>
             </a:r>
           </a:p>
         </p:txBody>
@@ -11193,7 +11127,18 @@
                 <a:ea typeface="Calibri"/>
                 <a:cs typeface="Calibri"/>
               </a:rPr>
-              <a:t>Förutsättningar: Förenklad modell: U₀ = 230 V och </a:t>
+              <a:t>Förutsättningar: Förenklad beräkning med U</a:t>
+            </a:r>
+            <a:r>
+              <a:rPr sz="2025" b="0" baseline="-25000">
+                <a:solidFill>
+                  <a:srgbClr val="111111"/>
+                </a:solidFill>
+                <a:latin typeface="Calibri"/>
+                <a:ea typeface="Calibri"/>
+                <a:cs typeface="Calibri"/>
+              </a:rPr>
+              <a:t>0</a:t>
             </a:r>
             <a:r>
               <a:rPr sz="2025" b="0">
@@ -11204,29 +11149,7 @@
                 <a:ea typeface="Calibri"/>
                 <a:cs typeface="Calibri"/>
               </a:rPr>
-              <a:t>Z</a:t>
-            </a:r>
-            <a:r>
-              <a:rPr sz="2025" b="0" baseline="-25000">
-                <a:solidFill>
-                  <a:srgbClr val="111111"/>
-                </a:solidFill>
-                <a:latin typeface="Calibri"/>
-                <a:ea typeface="Calibri"/>
-                <a:cs typeface="Calibri"/>
-              </a:rPr>
-              <a:t>s</a:t>
-            </a:r>
-            <a:r>
-              <a:rPr sz="2025" b="0">
-                <a:solidFill>
-                  <a:srgbClr val="111111"/>
-                </a:solidFill>
-                <a:latin typeface="Calibri"/>
-                <a:ea typeface="Calibri"/>
-                <a:cs typeface="Calibri"/>
-              </a:rPr>
-              <a:t> = 0,46 Ω.</a:t>
+              <a:t> = 230 V och Zs = 0,46 Ω.</a:t>
             </a:r>
           </a:p>
         </p:txBody>
@@ -11283,7 +11206,7 @@
                 <a:ea typeface="Calibri"/>
                 <a:cs typeface="Calibri"/>
               </a:rPr>
-              <a:t>Arbetsgång: Dividera spänningen med hela slingimpedansen. Resultatet räcker inte ensamt för skyddsdimensionering.</a:t>
+              <a:t>Arbetsgång: Dela spänningen med slingimpedansen. Svaret räcker inte ensamt för att välja skydd.</a:t>
             </a:r>
           </a:p>
         </p:txBody>
@@ -11560,7 +11483,18 @@
                 <a:ea typeface="Calibri"/>
                 <a:cs typeface="Calibri"/>
               </a:rPr>
-              <a:t>I en beräkningsmodell är U₀ = 230 V och </a:t>
+              <a:t>I en förenklad beräkning är U</a:t>
+            </a:r>
+            <a:r>
+              <a:rPr sz="2400" b="0" baseline="-25000">
+                <a:solidFill>
+                  <a:srgbClr val="111111"/>
+                </a:solidFill>
+                <a:latin typeface="Calibri"/>
+                <a:ea typeface="Calibri"/>
+                <a:cs typeface="Calibri"/>
+              </a:rPr>
+              <a:t>0</a:t>
             </a:r>
             <a:r>
               <a:rPr sz="2400" b="0">
@@ -11571,7 +11505,7 @@
                 <a:ea typeface="Calibri"/>
                 <a:cs typeface="Calibri"/>
               </a:rPr>
-              <a:t>Z</a:t>
+              <a:t> = 230 V och Zs = 0,46 Ω. Beräkna I</a:t>
             </a:r>
             <a:r>
               <a:rPr sz="2400" b="0" baseline="-25000">
@@ -11582,7 +11516,7 @@
                 <a:ea typeface="Calibri"/>
                 <a:cs typeface="Calibri"/>
               </a:rPr>
-              <a:t>s</a:t>
+              <a:t>k</a:t>
             </a:r>
             <a:r>
               <a:rPr sz="2400" b="0">
@@ -11593,7 +11527,7 @@
                 <a:ea typeface="Calibri"/>
                 <a:cs typeface="Calibri"/>
               </a:rPr>
-              <a:t> = 0,46 Ω. Beräkna Iₖ.</a:t>
+              <a:t>.</a:t>
             </a:r>
           </a:p>
         </p:txBody>
@@ -11893,7 +11827,128 @@
                 <a:ea typeface="Calibri"/>
                 <a:cs typeface="Calibri"/>
               </a:rPr>
-              <a:t>I₁ = U₀/Zs₁     I₂ = U₀/Zs₂</a:t>
+              <a:t>I</a:t>
+            </a:r>
+            <a:r>
+              <a:rPr sz="2400" b="1" baseline="-25000">
+                <a:solidFill>
+                  <a:srgbClr val="064F91"/>
+                </a:solidFill>
+                <a:latin typeface="Calibri"/>
+                <a:ea typeface="Calibri"/>
+                <a:cs typeface="Calibri"/>
+              </a:rPr>
+              <a:t>1</a:t>
+            </a:r>
+            <a:r>
+              <a:rPr sz="2400" b="1">
+                <a:solidFill>
+                  <a:srgbClr val="064F91"/>
+                </a:solidFill>
+                <a:latin typeface="Calibri"/>
+                <a:ea typeface="Calibri"/>
+                <a:cs typeface="Calibri"/>
+              </a:rPr>
+              <a:t> = U</a:t>
+            </a:r>
+            <a:r>
+              <a:rPr sz="2400" b="1" baseline="-25000">
+                <a:solidFill>
+                  <a:srgbClr val="064F91"/>
+                </a:solidFill>
+                <a:latin typeface="Calibri"/>
+                <a:ea typeface="Calibri"/>
+                <a:cs typeface="Calibri"/>
+              </a:rPr>
+              <a:t>0</a:t>
+            </a:r>
+            <a:r>
+              <a:rPr sz="2400" b="1">
+                <a:solidFill>
+                  <a:srgbClr val="064F91"/>
+                </a:solidFill>
+                <a:latin typeface="Calibri"/>
+                <a:ea typeface="Calibri"/>
+                <a:cs typeface="Calibri"/>
+              </a:rPr>
+              <a:t>/Zs</a:t>
+            </a:r>
+            <a:r>
+              <a:rPr sz="2400" b="1" baseline="-25000">
+                <a:solidFill>
+                  <a:srgbClr val="064F91"/>
+                </a:solidFill>
+                <a:latin typeface="Calibri"/>
+                <a:ea typeface="Calibri"/>
+                <a:cs typeface="Calibri"/>
+              </a:rPr>
+              <a:t>1</a:t>
+            </a:r>
+            <a:r>
+              <a:rPr sz="2400" b="1">
+                <a:solidFill>
+                  <a:srgbClr val="064F91"/>
+                </a:solidFill>
+                <a:latin typeface="Calibri"/>
+                <a:ea typeface="Calibri"/>
+                <a:cs typeface="Calibri"/>
+              </a:rPr>
+              <a:t>; I</a:t>
+            </a:r>
+            <a:r>
+              <a:rPr sz="2400" b="1" baseline="-25000">
+                <a:solidFill>
+                  <a:srgbClr val="064F91"/>
+                </a:solidFill>
+                <a:latin typeface="Calibri"/>
+                <a:ea typeface="Calibri"/>
+                <a:cs typeface="Calibri"/>
+              </a:rPr>
+              <a:t>2</a:t>
+            </a:r>
+            <a:r>
+              <a:rPr sz="2400" b="1">
+                <a:solidFill>
+                  <a:srgbClr val="064F91"/>
+                </a:solidFill>
+                <a:latin typeface="Calibri"/>
+                <a:ea typeface="Calibri"/>
+                <a:cs typeface="Calibri"/>
+              </a:rPr>
+              <a:t> = U</a:t>
+            </a:r>
+            <a:r>
+              <a:rPr sz="2400" b="1" baseline="-25000">
+                <a:solidFill>
+                  <a:srgbClr val="064F91"/>
+                </a:solidFill>
+                <a:latin typeface="Calibri"/>
+                <a:ea typeface="Calibri"/>
+                <a:cs typeface="Calibri"/>
+              </a:rPr>
+              <a:t>0</a:t>
+            </a:r>
+            <a:r>
+              <a:rPr sz="2400" b="1">
+                <a:solidFill>
+                  <a:srgbClr val="064F91"/>
+                </a:solidFill>
+                <a:latin typeface="Calibri"/>
+                <a:ea typeface="Calibri"/>
+                <a:cs typeface="Calibri"/>
+              </a:rPr>
+              <a:t>/Zs</a:t>
+            </a:r>
+            <a:r>
+              <a:rPr sz="2400" b="1" baseline="-25000">
+                <a:solidFill>
+                  <a:srgbClr val="064F91"/>
+                </a:solidFill>
+                <a:latin typeface="Calibri"/>
+                <a:ea typeface="Calibri"/>
+                <a:cs typeface="Calibri"/>
+              </a:rPr>
+              <a:t>2</a:t>
             </a:r>
           </a:p>
         </p:txBody>
@@ -11950,7 +12005,18 @@
                 <a:ea typeface="Calibri"/>
                 <a:cs typeface="Calibri"/>
               </a:rPr>
-              <a:t>Index 1 och 2 betecknar två fall. Vid samma U₀ är strömmen omvänt proportionell mot </a:t>
+              <a:t>1 och 2 står för de två fallen. Vid samma U</a:t>
+            </a:r>
+            <a:r>
+              <a:rPr sz="2100" b="0" baseline="-25000">
+                <a:solidFill>
+                  <a:srgbClr val="111111"/>
+                </a:solidFill>
+                <a:latin typeface="Calibri"/>
+                <a:ea typeface="Calibri"/>
+                <a:cs typeface="Calibri"/>
+              </a:rPr>
+              <a:t>0</a:t>
             </a:r>
             <a:r>
               <a:rPr sz="2100" b="0">
@@ -11961,29 +12027,7 @@
                 <a:ea typeface="Calibri"/>
                 <a:cs typeface="Calibri"/>
               </a:rPr>
-              <a:t>Z</a:t>
-            </a:r>
-            <a:r>
-              <a:rPr sz="2100" b="0" baseline="-25000">
-                <a:solidFill>
-                  <a:srgbClr val="111111"/>
-                </a:solidFill>
-                <a:latin typeface="Calibri"/>
-                <a:ea typeface="Calibri"/>
-                <a:cs typeface="Calibri"/>
-              </a:rPr>
-              <a:t>s</a:t>
-            </a:r>
-            <a:r>
-              <a:rPr sz="2100" b="0">
-                <a:solidFill>
-                  <a:srgbClr val="111111"/>
-                </a:solidFill>
-                <a:latin typeface="Calibri"/>
-                <a:ea typeface="Calibri"/>
-                <a:cs typeface="Calibri"/>
-              </a:rPr>
-              <a:t>.</a:t>
+              <a:t> blir strömmen hälften så stor när Zs blir dubbelt så stor.</a:t>
             </a:r>
           </a:p>
         </p:txBody>
@@ -12097,7 +12141,7 @@
                 <a:ea typeface="Calibri"/>
                 <a:cs typeface="Calibri"/>
               </a:rPr>
-              <a:t>Arbetsgång: Räkna båda strömmarna eller jämför impedanskvoten. Ange ändring och nytt belopp.</a:t>
+              <a:t>Arbetsgång: Räkna ut båda strömmarna och ange hur mycket strömmen ändras.</a:t>
             </a:r>
           </a:p>
         </p:txBody>
@@ -12888,29 +12932,7 @@
                 <a:ea typeface="Calibri"/>
                 <a:cs typeface="Calibri"/>
               </a:rPr>
-              <a:t>Z</a:t>
-            </a:r>
-            <a:r>
-              <a:rPr sz="2400" b="0" baseline="-25000">
-                <a:solidFill>
-                  <a:srgbClr val="111111"/>
-                </a:solidFill>
-                <a:latin typeface="Calibri"/>
-                <a:ea typeface="Calibri"/>
-                <a:cs typeface="Calibri"/>
-              </a:rPr>
-              <a:t>s</a:t>
-            </a:r>
-            <a:r>
-              <a:rPr sz="2400" b="0">
-                <a:solidFill>
-                  <a:srgbClr val="111111"/>
-                </a:solidFill>
-                <a:latin typeface="Calibri"/>
-                <a:ea typeface="Calibri"/>
-                <a:cs typeface="Calibri"/>
-              </a:rPr>
-              <a:t> ökar från 0,46 till 0,92 Ω vid oförändrade 230 V. Hur ändras felströmmen?</a:t>
+              <a:t>Zs ökar från 0,46 till 0,92 Ω vid oförändrade 230 V. Hur ändras felströmmen?</a:t>
             </a:r>
           </a:p>
         </p:txBody>
@@ -13243,7 +13265,7 @@
                 <a:ea typeface="Calibri"/>
                 <a:cs typeface="Calibri"/>
               </a:rPr>
-              <a:t>Ett överströmsskydds tid beror på strömmen och dess ström–tidsegenskap.</a:t>
+              <a:t>Hur snabbt ett överströmsskydd löser beror på strömmen och skyddets ström–tidkurva.</a:t>
             </a:r>
           </a:p>
         </p:txBody>
@@ -13300,7 +13322,7 @@
                 <a:ea typeface="Calibri"/>
                 <a:cs typeface="Calibri"/>
               </a:rPr>
-              <a:t>Förutsättningar: Möjlig felström är 1 000 A på nät och 200 A på reserv. Inga utlösningskurvor är givna.</a:t>
+              <a:t>Förutsättningar: Möjlig felström 1 000 A med normal matning och 200 A på reserv. Inga utlösningskurvor är givna.</a:t>
             </a:r>
           </a:p>
         </p:txBody>
@@ -13357,7 +13379,7 @@
                 <a:ea typeface="Calibri"/>
                 <a:cs typeface="Calibri"/>
               </a:rPr>
-              <a:t>Arbetsgång: Ange vilken kontroll som måste göras i båda fallen. Bestäm ingen exakt utlösningstid utan skyddsdata.</a:t>
+              <a:t>Arbetsgång: Ange vad som måste kontrolleras i båda fallen. Ange ingen utlösningstid – skyddets data saknas.</a:t>
             </a:r>
           </a:p>
         </p:txBody>
@@ -13634,7 +13656,7 @@
                 <a:ea typeface="Calibri"/>
                 <a:cs typeface="Calibri"/>
               </a:rPr>
-              <a:t>Vid nätmatning är möjlig felström 1 000 A, vid reservdrift 200 A. Vad behöver kontrolleras i skyddsplaneringen?</a:t>
+              <a:t>Med normal matning kan felströmmen bli 1 000 A, men vid reservdrift bara 200 A. Vad behöver kontrolleras när skydden planeras?</a:t>
             </a:r>
           </a:p>
         </p:txBody>
@@ -13967,7 +13989,7 @@
                 <a:ea typeface="Calibri"/>
                 <a:cs typeface="Calibri"/>
               </a:rPr>
-              <a:t>Samma fel eller bortfall får inte bedömas utan att veta vilka funktioner som måste kunna fortsätta.</a:t>
+              <a:t>Du måste veta vilka funktioner som ska fungera även när något går sönder.</a:t>
             </a:r>
           </a:p>
         </p:txBody>
@@ -14024,7 +14046,7 @@
                 <a:ea typeface="Calibri"/>
                 <a:cs typeface="Calibri"/>
               </a:rPr>
-              <a:t>Förutsättningar: Ordinarie utrustning och nödutrustning delar en fördelning. Fartygsdata och tillämpliga krav saknas.</a:t>
+              <a:t>Förutsättningar: Ordinarie utrustning och nödutrustning matas från samma fördelning. Fartygsdata och gällande krav är inte kända.</a:t>
             </a:r>
           </a:p>
         </p:txBody>
@@ -14081,7 +14103,7 @@
                 <a:ea typeface="Calibri"/>
                 <a:cs typeface="Calibri"/>
               </a:rPr>
-              <a:t>Arbetsgång: Identifiera behövda nödlasters funktion, reservmatning och möjliga gemensamma felpunkter.</a:t>
+              <a:t>Arbetsgång: Ta reda på vilka nödlaster som finns, hur de reservmatas och vilka fel som kan slå ut både ordinarie utrustning och nödutrustning samtidigt.</a:t>
             </a:r>
           </a:p>
         </p:txBody>
@@ -14358,7 +14380,7 @@
                 <a:ea typeface="Calibri"/>
                 <a:cs typeface="Calibri"/>
               </a:rPr>
-              <a:t>En enda fördelning matar både ordinarie utrustning och nödutrustning. Vilken dokumentationsfråga är viktig innan systemet bedöms?</a:t>
+              <a:t>En enda fördelning matar både ordinarie utrustning och nödutrustning. Vilken fråga måste dokumentationen svara på innan systemet kan bedömas?</a:t>
             </a:r>
           </a:p>
         </p:txBody>

--- a/sjoskolan/vecka-44/aktuell/v44_01_Lagspanningssystem_elev.pptx
+++ b/sjoskolan/vecka-44/aktuell/v44_01_Lagspanningssystem_elev.pptx
@@ -3790,7 +3790,7 @@
                 <a:ea typeface="Calibri"/>
                 <a:cs typeface="Calibri"/>
               </a:rPr>
-              <a:t>Stöd till övning 1</a:t>
+              <a:t>Stöd till övning 1.1</a:t>
             </a:r>
           </a:p>
         </p:txBody>
@@ -4179,7 +4179,7 @@
                 <a:ea typeface="Calibri"/>
                 <a:cs typeface="Calibri"/>
               </a:rPr>
-              <a:t>Övning 1</a:t>
+              <a:t>Övning 1.1</a:t>
             </a:r>
           </a:p>
         </p:txBody>
@@ -4514,7 +4514,7 @@
                 <a:ea typeface="Calibri"/>
                 <a:cs typeface="Calibri"/>
               </a:rPr>
-              <a:t>Stöd till övning 2</a:t>
+              <a:t>Stöd till övning 1.2</a:t>
             </a:r>
           </a:p>
         </p:txBody>
@@ -4903,7 +4903,7 @@
                 <a:ea typeface="Calibri"/>
                 <a:cs typeface="Calibri"/>
               </a:rPr>
-              <a:t>Övning 2</a:t>
+              <a:t>Övning 1.2</a:t>
             </a:r>
           </a:p>
         </p:txBody>
@@ -5238,7 +5238,7 @@
                 <a:ea typeface="Calibri"/>
                 <a:cs typeface="Calibri"/>
               </a:rPr>
-              <a:t>Stöd till övning 3</a:t>
+              <a:t>Stöd till övning 1.3</a:t>
             </a:r>
           </a:p>
         </p:txBody>
@@ -5627,7 +5627,7 @@
                 <a:ea typeface="Calibri"/>
                 <a:cs typeface="Calibri"/>
               </a:rPr>
-              <a:t>Övning 3</a:t>
+              <a:t>Övning 1.3</a:t>
             </a:r>
           </a:p>
         </p:txBody>
@@ -5962,7 +5962,7 @@
                 <a:ea typeface="Calibri"/>
                 <a:cs typeface="Calibri"/>
               </a:rPr>
-              <a:t>Stöd till övning 4</a:t>
+              <a:t>Stöd till övning 1.4</a:t>
             </a:r>
           </a:p>
         </p:txBody>
@@ -6351,7 +6351,7 @@
                 <a:ea typeface="Calibri"/>
                 <a:cs typeface="Calibri"/>
               </a:rPr>
-              <a:t>Övning 4</a:t>
+              <a:t>Övning 1.4</a:t>
             </a:r>
           </a:p>
         </p:txBody>
@@ -6686,7 +6686,7 @@
                 <a:ea typeface="Calibri"/>
                 <a:cs typeface="Calibri"/>
               </a:rPr>
-              <a:t>Stöd till övning 5</a:t>
+              <a:t>Stöd till övning 1.5</a:t>
             </a:r>
           </a:p>
         </p:txBody>
@@ -7075,7 +7075,7 @@
                 <a:ea typeface="Calibri"/>
                 <a:cs typeface="Calibri"/>
               </a:rPr>
-              <a:t>Övning 5</a:t>
+              <a:t>Övning 1.5</a:t>
             </a:r>
           </a:p>
         </p:txBody>
@@ -9988,7 +9988,7 @@
                 <a:ea typeface="Calibri"/>
                 <a:cs typeface="Calibri"/>
               </a:rPr>
-              <a:t>Stöd till övning 6</a:t>
+              <a:t>Stöd till övning 1.6</a:t>
             </a:r>
           </a:p>
         </p:txBody>
@@ -10509,7 +10509,7 @@
                 <a:ea typeface="Calibri"/>
                 <a:cs typeface="Calibri"/>
               </a:rPr>
-              <a:t>Övning 6</a:t>
+              <a:t>Övning 1.6</a:t>
             </a:r>
           </a:p>
         </p:txBody>
@@ -10868,7 +10868,7 @@
                 <a:ea typeface="Calibri"/>
                 <a:cs typeface="Calibri"/>
               </a:rPr>
-              <a:t>Stöd till övning 7</a:t>
+              <a:t>Stöd till övning 1.7</a:t>
             </a:r>
           </a:p>
         </p:txBody>
@@ -11367,7 +11367,7 @@
                 <a:ea typeface="Calibri"/>
                 <a:cs typeface="Calibri"/>
               </a:rPr>
-              <a:t>Övning 7</a:t>
+              <a:t>Övning 1.7</a:t>
             </a:r>
           </a:p>
         </p:txBody>
@@ -11770,7 +11770,7 @@
                 <a:ea typeface="Calibri"/>
                 <a:cs typeface="Calibri"/>
               </a:rPr>
-              <a:t>Stöd till övning 8</a:t>
+              <a:t>Stöd till övning 1.8</a:t>
             </a:r>
           </a:p>
         </p:txBody>
@@ -12816,7 +12816,7 @@
                 <a:ea typeface="Calibri"/>
                 <a:cs typeface="Calibri"/>
               </a:rPr>
-              <a:t>Övning 8</a:t>
+              <a:t>Övning 1.8</a:t>
             </a:r>
           </a:p>
         </p:txBody>
@@ -13151,7 +13151,7 @@
                 <a:ea typeface="Calibri"/>
                 <a:cs typeface="Calibri"/>
               </a:rPr>
-              <a:t>Stöd till övning 9</a:t>
+              <a:t>Stöd till övning 1.9</a:t>
             </a:r>
           </a:p>
         </p:txBody>
@@ -13540,7 +13540,7 @@
                 <a:ea typeface="Calibri"/>
                 <a:cs typeface="Calibri"/>
               </a:rPr>
-              <a:t>Övning 9</a:t>
+              <a:t>Övning 1.9</a:t>
             </a:r>
           </a:p>
         </p:txBody>
@@ -13875,7 +13875,7 @@
                 <a:ea typeface="Calibri"/>
                 <a:cs typeface="Calibri"/>
               </a:rPr>
-              <a:t>Stöd till övning 10</a:t>
+              <a:t>Stöd till övning 1.10</a:t>
             </a:r>
           </a:p>
         </p:txBody>
@@ -14264,7 +14264,7 @@
                 <a:ea typeface="Calibri"/>
                 <a:cs typeface="Calibri"/>
               </a:rPr>
-              <a:t>Övning 10</a:t>
+              <a:t>Övning 1.10</a:t>
             </a:r>
           </a:p>
         </p:txBody>

--- a/sjoskolan/vecka-44/aktuell/v44_01_Lagspanningssystem_elev.pptx
+++ b/sjoskolan/vecka-44/aktuell/v44_01_Lagspanningssystem_elev.pptx
@@ -7969,7 +7969,7 @@
                 <a:ea typeface="Calibri"/>
                 <a:cs typeface="Calibri"/>
               </a:rPr>
-              <a:t>Teori och exempel följs av övning 6–10.</a:t>
+              <a:t>Teori och exempel följs av övning 1.6–1.10.</a:t>
             </a:r>
           </a:p>
           <a:p xmlns:a="http://schemas.openxmlformats.org/drawingml/2006/main">
@@ -12438,7 +12438,7 @@
                 <a:ea typeface="Calibri"/>
                 <a:cs typeface="Calibri"/>
               </a:rPr>
-              <a:t>15 min övning 1, 2, 4, 5 min återkoppling</a:t>
+              <a:t>15 min övning 1.1, 1.2 och 1.4, 5 min återkoppling</a:t>
             </a:r>
           </a:p>
         </p:txBody>
@@ -12552,7 +12552,7 @@
                 <a:ea typeface="Calibri"/>
                 <a:cs typeface="Calibri"/>
               </a:rPr>
-              <a:t>20 min teori och exempel, 15 min övning 6, 7, 8</a:t>
+              <a:t>20 min teori och exempel, 15 min övning 1.6, 1.7 och 1.8</a:t>
             </a:r>
           </a:p>
           <a:p xmlns:a="http://schemas.openxmlformats.org/drawingml/2006/main">
@@ -16727,658 +16727,6 @@
       </p:sp>
       <p:sp>
         <p:nvSpPr>
-          <p:cNvPr id="4" name="">
-            <a:extLst xmlns:a="http://schemas.openxmlformats.org/drawingml/2006/main">
-              <a:ext uri="{FF2B5EF4-FFF2-40B4-BE49-F238E27FC236}">
-                <a16:creationId xmlns:a16="http://schemas.microsoft.com/office/drawing/2014/main" id="{9E269EE2-E26C-493C-B9AB-DA433B4FDA71}"/>
-              </a:ext>
-            </a:extLst>
-          </p:cNvPr>
-          <p:cNvSpPr>
-            <a:spLocks xmlns:a="http://schemas.openxmlformats.org/drawingml/2006/main" noGrp="1"/>
-          </p:cNvSpPr>
-          <p:nvPr/>
-        </p:nvSpPr>
-        <p:spPr>
-          <a:xfrm xmlns:a="http://schemas.openxmlformats.org/drawingml/2006/main">
-            <a:off x="1634133" y="3127772"/>
-            <a:ext cx="932656" cy="578247"/>
-          </a:xfrm>
-          <a:prstGeom xmlns:a="http://schemas.openxmlformats.org/drawingml/2006/main" prst="rect">
-            <a:avLst/>
-          </a:prstGeom>
-          <a:solidFill xmlns:a="http://schemas.openxmlformats.org/drawingml/2006/main">
-            <a:srgbClr val="FFFFFF"/>
-          </a:solidFill>
-          <a:ln xmlns:a="http://schemas.openxmlformats.org/drawingml/2006/main" w="19050">
-            <a:solidFill>
-              <a:srgbClr val="111111"/>
-            </a:solidFill>
-          </a:ln>
-        </p:spPr>
-        <p:txBody xmlns:a="http://schemas.openxmlformats.org/drawingml/2006/main">
-          <a:bodyPr/>
-          <a:p/>
-        </p:txBody>
-      </p:sp>
-      <p:sp>
-        <p:nvSpPr>
-          <p:cNvPr id="5" name="Källa">
-            <a:extLst xmlns:a="http://schemas.openxmlformats.org/drawingml/2006/main">
-              <a:ext uri="{FF2B5EF4-FFF2-40B4-BE49-F238E27FC236}">
-                <a16:creationId xmlns:a16="http://schemas.microsoft.com/office/drawing/2014/main" id="{A8A2BD37-534A-4074-A56D-AB67A7C011BF}"/>
-              </a:ext>
-            </a:extLst>
-          </p:cNvPr>
-          <p:cNvSpPr>
-            <a:spLocks xmlns:a="http://schemas.openxmlformats.org/drawingml/2006/main" noGrp="1"/>
-          </p:cNvSpPr>
-          <p:nvPr/>
-        </p:nvSpPr>
-        <p:spPr>
-          <a:xfrm xmlns:a="http://schemas.openxmlformats.org/drawingml/2006/main">
-            <a:off x="1428948" y="3799284"/>
-            <a:ext cx="1352352" cy="335756"/>
-          </a:xfrm>
-          <a:prstGeom xmlns:a="http://schemas.openxmlformats.org/drawingml/2006/main" prst="rect">
-            <a:avLst/>
-          </a:prstGeom>
-          <a:noFill xmlns:a="http://schemas.openxmlformats.org/drawingml/2006/main"/>
-          <a:ln xmlns:a="http://schemas.openxmlformats.org/drawingml/2006/main" w="0">
-            <a:noFill/>
-          </a:ln>
-        </p:spPr>
-        <p:txBody>
-          <a:bodyPr xmlns:a="http://schemas.openxmlformats.org/drawingml/2006/main" wrap="square" lIns="0" tIns="0" rIns="0" bIns="0" anchor="t">
-            <a:noAutofit/>
-          </a:bodyPr>
-          <a:lstStyle xmlns:a="http://schemas.openxmlformats.org/drawingml/2006/main"/>
-          <a:p xmlns:a="http://schemas.openxmlformats.org/drawingml/2006/main">
-            <a:pPr algn="ctr">
-              <a:buNone/>
-              <a:defRPr sz="1763" b="0">
-                <a:solidFill>
-                  <a:srgbClr val="111111"/>
-                </a:solidFill>
-                <a:latin typeface="Calibri"/>
-                <a:ea typeface="Calibri"/>
-                <a:cs typeface="Calibri"/>
-              </a:defRPr>
-            </a:pPr>
-            <a:r>
-              <a:rPr sz="1763" b="0">
-                <a:solidFill>
-                  <a:srgbClr val="111111"/>
-                </a:solidFill>
-                <a:latin typeface="Calibri"/>
-                <a:ea typeface="Calibri"/>
-                <a:cs typeface="Calibri"/>
-              </a:rPr>
-              <a:t>Källa</a:t>
-            </a:r>
-          </a:p>
-        </p:txBody>
-      </p:sp>
-      <p:sp>
-        <p:nvSpPr>
-          <p:cNvPr id="6" name="">
-            <a:extLst xmlns:a="http://schemas.openxmlformats.org/drawingml/2006/main">
-              <a:ext uri="{FF2B5EF4-FFF2-40B4-BE49-F238E27FC236}">
-                <a16:creationId xmlns:a16="http://schemas.microsoft.com/office/drawing/2014/main" id="{427BA4A4-C479-4C59-B4D8-4813AC32A810}"/>
-              </a:ext>
-            </a:extLst>
-          </p:cNvPr>
-          <p:cNvSpPr>
-            <a:spLocks xmlns:a="http://schemas.openxmlformats.org/drawingml/2006/main" noGrp="1"/>
-          </p:cNvSpPr>
-          <p:nvPr/>
-        </p:nvSpPr>
-        <p:spPr>
-          <a:xfrm xmlns:a="http://schemas.openxmlformats.org/drawingml/2006/main" flipH="0" flipV="0">
-            <a:off x="2566789" y="3416895"/>
-            <a:ext cx="652859" cy="0"/>
-          </a:xfrm>
-          <a:prstGeom xmlns:a="http://schemas.openxmlformats.org/drawingml/2006/main" prst="line">
-            <a:avLst/>
-          </a:prstGeom>
-          <a:noFill xmlns:a="http://schemas.openxmlformats.org/drawingml/2006/main"/>
-          <a:ln xmlns:a="http://schemas.openxmlformats.org/drawingml/2006/main" w="20955">
-            <a:solidFill>
-              <a:srgbClr val="111111"/>
-            </a:solidFill>
-          </a:ln>
-        </p:spPr>
-        <p:txBody xmlns:a="http://schemas.openxmlformats.org/drawingml/2006/main">
-          <a:bodyPr/>
-          <a:p/>
-        </p:txBody>
-      </p:sp>
-      <p:sp>
-        <p:nvSpPr>
-          <p:cNvPr id="7" name="">
-            <a:extLst xmlns:a="http://schemas.openxmlformats.org/drawingml/2006/main">
-              <a:ext uri="{FF2B5EF4-FFF2-40B4-BE49-F238E27FC236}">
-                <a16:creationId xmlns:a16="http://schemas.microsoft.com/office/drawing/2014/main" id="{9A62880C-CC6D-456B-934D-A6E7BE4BA8AC}"/>
-              </a:ext>
-            </a:extLst>
-          </p:cNvPr>
-          <p:cNvSpPr>
-            <a:spLocks xmlns:a="http://schemas.openxmlformats.org/drawingml/2006/main" noGrp="1"/>
-          </p:cNvSpPr>
-          <p:nvPr/>
-        </p:nvSpPr>
-        <p:spPr>
-          <a:xfrm xmlns:a="http://schemas.openxmlformats.org/drawingml/2006/main">
-            <a:off x="3219648" y="3127772"/>
-            <a:ext cx="932656" cy="578247"/>
-          </a:xfrm>
-          <a:prstGeom xmlns:a="http://schemas.openxmlformats.org/drawingml/2006/main" prst="rect">
-            <a:avLst/>
-          </a:prstGeom>
-          <a:solidFill xmlns:a="http://schemas.openxmlformats.org/drawingml/2006/main">
-            <a:srgbClr val="FFFFFF"/>
-          </a:solidFill>
-          <a:ln xmlns:a="http://schemas.openxmlformats.org/drawingml/2006/main" w="19050">
-            <a:solidFill>
-              <a:srgbClr val="111111"/>
-            </a:solidFill>
-          </a:ln>
-        </p:spPr>
-        <p:txBody xmlns:a="http://schemas.openxmlformats.org/drawingml/2006/main">
-          <a:bodyPr/>
-          <a:p/>
-        </p:txBody>
-      </p:sp>
-      <p:sp>
-        <p:nvSpPr>
-          <p:cNvPr id="8" name="Skydd">
-            <a:extLst xmlns:a="http://schemas.openxmlformats.org/drawingml/2006/main">
-              <a:ext uri="{FF2B5EF4-FFF2-40B4-BE49-F238E27FC236}">
-                <a16:creationId xmlns:a16="http://schemas.microsoft.com/office/drawing/2014/main" id="{2AE7E3C0-496A-41DC-BBF2-33A582EE5D6C}"/>
-              </a:ext>
-            </a:extLst>
-          </p:cNvPr>
-          <p:cNvSpPr>
-            <a:spLocks xmlns:a="http://schemas.openxmlformats.org/drawingml/2006/main" noGrp="1"/>
-          </p:cNvSpPr>
-          <p:nvPr/>
-        </p:nvSpPr>
-        <p:spPr>
-          <a:xfrm xmlns:a="http://schemas.openxmlformats.org/drawingml/2006/main">
-            <a:off x="3014464" y="3799284"/>
-            <a:ext cx="1352352" cy="335756"/>
-          </a:xfrm>
-          <a:prstGeom xmlns:a="http://schemas.openxmlformats.org/drawingml/2006/main" prst="rect">
-            <a:avLst/>
-          </a:prstGeom>
-          <a:noFill xmlns:a="http://schemas.openxmlformats.org/drawingml/2006/main"/>
-          <a:ln xmlns:a="http://schemas.openxmlformats.org/drawingml/2006/main" w="0">
-            <a:noFill/>
-          </a:ln>
-        </p:spPr>
-        <p:txBody>
-          <a:bodyPr xmlns:a="http://schemas.openxmlformats.org/drawingml/2006/main" wrap="square" lIns="0" tIns="0" rIns="0" bIns="0" anchor="t">
-            <a:noAutofit/>
-          </a:bodyPr>
-          <a:lstStyle xmlns:a="http://schemas.openxmlformats.org/drawingml/2006/main"/>
-          <a:p xmlns:a="http://schemas.openxmlformats.org/drawingml/2006/main">
-            <a:pPr algn="ctr">
-              <a:buNone/>
-              <a:defRPr sz="1763" b="0">
-                <a:solidFill>
-                  <a:srgbClr val="111111"/>
-                </a:solidFill>
-                <a:latin typeface="Calibri"/>
-                <a:ea typeface="Calibri"/>
-                <a:cs typeface="Calibri"/>
-              </a:defRPr>
-            </a:pPr>
-            <a:r>
-              <a:rPr sz="1763" b="0">
-                <a:solidFill>
-                  <a:srgbClr val="111111"/>
-                </a:solidFill>
-                <a:latin typeface="Calibri"/>
-                <a:ea typeface="Calibri"/>
-                <a:cs typeface="Calibri"/>
-              </a:rPr>
-              <a:t>Skydd</a:t>
-            </a:r>
-          </a:p>
-        </p:txBody>
-      </p:sp>
-      <p:sp>
-        <p:nvSpPr>
-          <p:cNvPr id="9" name="">
-            <a:extLst xmlns:a="http://schemas.openxmlformats.org/drawingml/2006/main">
-              <a:ext uri="{FF2B5EF4-FFF2-40B4-BE49-F238E27FC236}">
-                <a16:creationId xmlns:a16="http://schemas.microsoft.com/office/drawing/2014/main" id="{3C7703A2-C601-491F-BECF-A56EFE1D0578}"/>
-              </a:ext>
-            </a:extLst>
-          </p:cNvPr>
-          <p:cNvSpPr>
-            <a:spLocks xmlns:a="http://schemas.openxmlformats.org/drawingml/2006/main" noGrp="1"/>
-          </p:cNvSpPr>
-          <p:nvPr/>
-        </p:nvSpPr>
-        <p:spPr>
-          <a:xfrm xmlns:a="http://schemas.openxmlformats.org/drawingml/2006/main" flipH="0" flipV="0">
-            <a:off x="4152305" y="3416895"/>
-            <a:ext cx="652859" cy="0"/>
-          </a:xfrm>
-          <a:prstGeom xmlns:a="http://schemas.openxmlformats.org/drawingml/2006/main" prst="line">
-            <a:avLst/>
-          </a:prstGeom>
-          <a:noFill xmlns:a="http://schemas.openxmlformats.org/drawingml/2006/main"/>
-          <a:ln xmlns:a="http://schemas.openxmlformats.org/drawingml/2006/main" w="20955">
-            <a:solidFill>
-              <a:srgbClr val="111111"/>
-            </a:solidFill>
-          </a:ln>
-        </p:spPr>
-        <p:txBody xmlns:a="http://schemas.openxmlformats.org/drawingml/2006/main">
-          <a:bodyPr/>
-          <a:p/>
-        </p:txBody>
-      </p:sp>
-      <p:sp>
-        <p:nvSpPr>
-          <p:cNvPr id="10" name="">
-            <a:extLst xmlns:a="http://schemas.openxmlformats.org/drawingml/2006/main">
-              <a:ext uri="{FF2B5EF4-FFF2-40B4-BE49-F238E27FC236}">
-                <a16:creationId xmlns:a16="http://schemas.microsoft.com/office/drawing/2014/main" id="{7D964526-9118-4F2E-9519-64EB9D418EC9}"/>
-              </a:ext>
-            </a:extLst>
-          </p:cNvPr>
-          <p:cNvSpPr>
-            <a:spLocks xmlns:a="http://schemas.openxmlformats.org/drawingml/2006/main" noGrp="1"/>
-          </p:cNvSpPr>
-          <p:nvPr/>
-        </p:nvSpPr>
-        <p:spPr>
-          <a:xfrm xmlns:a="http://schemas.openxmlformats.org/drawingml/2006/main">
-            <a:off x="4805164" y="3127772"/>
-            <a:ext cx="932656" cy="578247"/>
-          </a:xfrm>
-          <a:prstGeom xmlns:a="http://schemas.openxmlformats.org/drawingml/2006/main" prst="rect">
-            <a:avLst/>
-          </a:prstGeom>
-          <a:solidFill xmlns:a="http://schemas.openxmlformats.org/drawingml/2006/main">
-            <a:srgbClr val="FFFFFF"/>
-          </a:solidFill>
-          <a:ln xmlns:a="http://schemas.openxmlformats.org/drawingml/2006/main" w="19050">
-            <a:solidFill>
-              <a:srgbClr val="111111"/>
-            </a:solidFill>
-          </a:ln>
-        </p:spPr>
-        <p:txBody xmlns:a="http://schemas.openxmlformats.org/drawingml/2006/main">
-          <a:bodyPr/>
-          <a:p/>
-        </p:txBody>
-      </p:sp>
-      <p:sp>
-        <p:nvSpPr>
-          <p:cNvPr id="11" name="Fördelning">
-            <a:extLst xmlns:a="http://schemas.openxmlformats.org/drawingml/2006/main">
-              <a:ext uri="{FF2B5EF4-FFF2-40B4-BE49-F238E27FC236}">
-                <a16:creationId xmlns:a16="http://schemas.microsoft.com/office/drawing/2014/main" id="{7C93E7D8-2CBF-4678-BCA0-CE2561B6A806}"/>
-              </a:ext>
-            </a:extLst>
-          </p:cNvPr>
-          <p:cNvSpPr>
-            <a:spLocks xmlns:a="http://schemas.openxmlformats.org/drawingml/2006/main" noGrp="1"/>
-          </p:cNvSpPr>
-          <p:nvPr/>
-        </p:nvSpPr>
-        <p:spPr>
-          <a:xfrm xmlns:a="http://schemas.openxmlformats.org/drawingml/2006/main">
-            <a:off x="4599980" y="3799284"/>
-            <a:ext cx="1352352" cy="335756"/>
-          </a:xfrm>
-          <a:prstGeom xmlns:a="http://schemas.openxmlformats.org/drawingml/2006/main" prst="rect">
-            <a:avLst/>
-          </a:prstGeom>
-          <a:noFill xmlns:a="http://schemas.openxmlformats.org/drawingml/2006/main"/>
-          <a:ln xmlns:a="http://schemas.openxmlformats.org/drawingml/2006/main" w="0">
-            <a:noFill/>
-          </a:ln>
-        </p:spPr>
-        <p:txBody>
-          <a:bodyPr xmlns:a="http://schemas.openxmlformats.org/drawingml/2006/main" wrap="square" lIns="0" tIns="0" rIns="0" bIns="0" anchor="t">
-            <a:noAutofit/>
-          </a:bodyPr>
-          <a:lstStyle xmlns:a="http://schemas.openxmlformats.org/drawingml/2006/main"/>
-          <a:p xmlns:a="http://schemas.openxmlformats.org/drawingml/2006/main">
-            <a:pPr algn="ctr">
-              <a:buNone/>
-              <a:defRPr sz="1763" b="0">
-                <a:solidFill>
-                  <a:srgbClr val="111111"/>
-                </a:solidFill>
-                <a:latin typeface="Calibri"/>
-                <a:ea typeface="Calibri"/>
-                <a:cs typeface="Calibri"/>
-              </a:defRPr>
-            </a:pPr>
-            <a:r>
-              <a:rPr sz="1763" b="0">
-                <a:solidFill>
-                  <a:srgbClr val="111111"/>
-                </a:solidFill>
-                <a:latin typeface="Calibri"/>
-                <a:ea typeface="Calibri"/>
-                <a:cs typeface="Calibri"/>
-              </a:rPr>
-              <a:t>Fördelning</a:t>
-            </a:r>
-          </a:p>
-        </p:txBody>
-      </p:sp>
-      <p:sp>
-        <p:nvSpPr>
-          <p:cNvPr id="12" name="">
-            <a:extLst xmlns:a="http://schemas.openxmlformats.org/drawingml/2006/main">
-              <a:ext uri="{FF2B5EF4-FFF2-40B4-BE49-F238E27FC236}">
-                <a16:creationId xmlns:a16="http://schemas.microsoft.com/office/drawing/2014/main" id="{97D245C2-37E4-42E4-93E1-15065E51DBAE}"/>
-              </a:ext>
-            </a:extLst>
-          </p:cNvPr>
-          <p:cNvSpPr>
-            <a:spLocks xmlns:a="http://schemas.openxmlformats.org/drawingml/2006/main" noGrp="1"/>
-          </p:cNvSpPr>
-          <p:nvPr/>
-        </p:nvSpPr>
-        <p:spPr>
-          <a:xfrm xmlns:a="http://schemas.openxmlformats.org/drawingml/2006/main" flipH="0" flipV="0">
-            <a:off x="5737820" y="3416895"/>
-            <a:ext cx="652859" cy="0"/>
-          </a:xfrm>
-          <a:prstGeom xmlns:a="http://schemas.openxmlformats.org/drawingml/2006/main" prst="line">
-            <a:avLst/>
-          </a:prstGeom>
-          <a:noFill xmlns:a="http://schemas.openxmlformats.org/drawingml/2006/main"/>
-          <a:ln xmlns:a="http://schemas.openxmlformats.org/drawingml/2006/main" w="20955">
-            <a:solidFill>
-              <a:srgbClr val="111111"/>
-            </a:solidFill>
-          </a:ln>
-        </p:spPr>
-        <p:txBody xmlns:a="http://schemas.openxmlformats.org/drawingml/2006/main">
-          <a:bodyPr/>
-          <a:p/>
-        </p:txBody>
-      </p:sp>
-      <p:sp>
-        <p:nvSpPr>
-          <p:cNvPr id="13" name="">
-            <a:extLst xmlns:a="http://schemas.openxmlformats.org/drawingml/2006/main">
-              <a:ext uri="{FF2B5EF4-FFF2-40B4-BE49-F238E27FC236}">
-                <a16:creationId xmlns:a16="http://schemas.microsoft.com/office/drawing/2014/main" id="{59E2E981-1705-4CA7-B5FE-341CA58260BE}"/>
-              </a:ext>
-            </a:extLst>
-          </p:cNvPr>
-          <p:cNvSpPr>
-            <a:spLocks xmlns:a="http://schemas.openxmlformats.org/drawingml/2006/main" noGrp="1"/>
-          </p:cNvSpPr>
-          <p:nvPr/>
-        </p:nvSpPr>
-        <p:spPr>
-          <a:xfrm xmlns:a="http://schemas.openxmlformats.org/drawingml/2006/main">
-            <a:off x="6390680" y="3127772"/>
-            <a:ext cx="932656" cy="578247"/>
-          </a:xfrm>
-          <a:prstGeom xmlns:a="http://schemas.openxmlformats.org/drawingml/2006/main" prst="rect">
-            <a:avLst/>
-          </a:prstGeom>
-          <a:solidFill xmlns:a="http://schemas.openxmlformats.org/drawingml/2006/main">
-            <a:srgbClr val="FFFFFF"/>
-          </a:solidFill>
-          <a:ln xmlns:a="http://schemas.openxmlformats.org/drawingml/2006/main" w="19050">
-            <a:solidFill>
-              <a:srgbClr val="111111"/>
-            </a:solidFill>
-          </a:ln>
-        </p:spPr>
-        <p:txBody xmlns:a="http://schemas.openxmlformats.org/drawingml/2006/main">
-          <a:bodyPr/>
-          <a:p/>
-        </p:txBody>
-      </p:sp>
-      <p:sp>
-        <p:nvSpPr>
-          <p:cNvPr id="14" name="Last">
-            <a:extLst xmlns:a="http://schemas.openxmlformats.org/drawingml/2006/main">
-              <a:ext uri="{FF2B5EF4-FFF2-40B4-BE49-F238E27FC236}">
-                <a16:creationId xmlns:a16="http://schemas.microsoft.com/office/drawing/2014/main" id="{4255CAE9-9AB1-4CF7-9A98-345791A3A8EC}"/>
-              </a:ext>
-            </a:extLst>
-          </p:cNvPr>
-          <p:cNvSpPr>
-            <a:spLocks xmlns:a="http://schemas.openxmlformats.org/drawingml/2006/main" noGrp="1"/>
-          </p:cNvSpPr>
-          <p:nvPr/>
-        </p:nvSpPr>
-        <p:spPr>
-          <a:xfrm xmlns:a="http://schemas.openxmlformats.org/drawingml/2006/main">
-            <a:off x="6185495" y="3799284"/>
-            <a:ext cx="1352352" cy="335756"/>
-          </a:xfrm>
-          <a:prstGeom xmlns:a="http://schemas.openxmlformats.org/drawingml/2006/main" prst="rect">
-            <a:avLst/>
-          </a:prstGeom>
-          <a:noFill xmlns:a="http://schemas.openxmlformats.org/drawingml/2006/main"/>
-          <a:ln xmlns:a="http://schemas.openxmlformats.org/drawingml/2006/main" w="0">
-            <a:noFill/>
-          </a:ln>
-        </p:spPr>
-        <p:txBody>
-          <a:bodyPr xmlns:a="http://schemas.openxmlformats.org/drawingml/2006/main" wrap="square" lIns="0" tIns="0" rIns="0" bIns="0" anchor="t">
-            <a:noAutofit/>
-          </a:bodyPr>
-          <a:lstStyle xmlns:a="http://schemas.openxmlformats.org/drawingml/2006/main"/>
-          <a:p xmlns:a="http://schemas.openxmlformats.org/drawingml/2006/main">
-            <a:pPr algn="ctr">
-              <a:buNone/>
-              <a:defRPr sz="1763" b="0">
-                <a:solidFill>
-                  <a:srgbClr val="111111"/>
-                </a:solidFill>
-                <a:latin typeface="Calibri"/>
-                <a:ea typeface="Calibri"/>
-                <a:cs typeface="Calibri"/>
-              </a:defRPr>
-            </a:pPr>
-            <a:r>
-              <a:rPr sz="1763" b="0">
-                <a:solidFill>
-                  <a:srgbClr val="111111"/>
-                </a:solidFill>
-                <a:latin typeface="Calibri"/>
-                <a:ea typeface="Calibri"/>
-                <a:cs typeface="Calibri"/>
-              </a:rPr>
-              <a:t>Last</a:t>
-            </a:r>
-          </a:p>
-        </p:txBody>
-      </p:sp>
-      <p:sp>
-        <p:nvSpPr>
-          <p:cNvPr id="15" name="Enlinjemodell">
-            <a:extLst xmlns:a="http://schemas.openxmlformats.org/drawingml/2006/main">
-              <a:ext uri="{FF2B5EF4-FFF2-40B4-BE49-F238E27FC236}">
-                <a16:creationId xmlns:a16="http://schemas.microsoft.com/office/drawing/2014/main" id="{137C544D-5515-47F5-B9E3-C13615D05833}"/>
-              </a:ext>
-            </a:extLst>
-          </p:cNvPr>
-          <p:cNvSpPr>
-            <a:spLocks xmlns:a="http://schemas.openxmlformats.org/drawingml/2006/main" noGrp="1"/>
-          </p:cNvSpPr>
-          <p:nvPr/>
-        </p:nvSpPr>
-        <p:spPr>
-          <a:xfrm xmlns:a="http://schemas.openxmlformats.org/drawingml/2006/main">
-            <a:off x="2799953" y="2474913"/>
-            <a:ext cx="3544094" cy="335756"/>
-          </a:xfrm>
-          <a:prstGeom xmlns:a="http://schemas.openxmlformats.org/drawingml/2006/main" prst="rect">
-            <a:avLst/>
-          </a:prstGeom>
-          <a:noFill xmlns:a="http://schemas.openxmlformats.org/drawingml/2006/main"/>
-          <a:ln xmlns:a="http://schemas.openxmlformats.org/drawingml/2006/main" w="0">
-            <a:noFill/>
-          </a:ln>
-        </p:spPr>
-        <p:txBody>
-          <a:bodyPr xmlns:a="http://schemas.openxmlformats.org/drawingml/2006/main" wrap="square" lIns="0" tIns="0" rIns="0" bIns="0" anchor="t">
-            <a:noAutofit/>
-          </a:bodyPr>
-          <a:lstStyle xmlns:a="http://schemas.openxmlformats.org/drawingml/2006/main"/>
-          <a:p xmlns:a="http://schemas.openxmlformats.org/drawingml/2006/main">
-            <a:pPr algn="ctr">
-              <a:buNone/>
-              <a:defRPr sz="1836" b="0">
-                <a:solidFill>
-                  <a:srgbClr val="111111"/>
-                </a:solidFill>
-                <a:latin typeface="Calibri"/>
-                <a:ea typeface="Calibri"/>
-                <a:cs typeface="Calibri"/>
-              </a:defRPr>
-            </a:pPr>
-            <a:r>
-              <a:rPr sz="1836" b="0">
-                <a:solidFill>
-                  <a:srgbClr val="111111"/>
-                </a:solidFill>
-                <a:latin typeface="Calibri"/>
-                <a:ea typeface="Calibri"/>
-                <a:cs typeface="Calibri"/>
-              </a:rPr>
-              <a:t>Enlinjemodell</a:t>
-            </a:r>
-          </a:p>
-        </p:txBody>
-      </p:sp>
-      <p:sp>
-        <p:nvSpPr>
-          <p:cNvPr id="16" name="Mätpunkt A">
-            <a:extLst xmlns:a="http://schemas.openxmlformats.org/drawingml/2006/main">
-              <a:ext uri="{FF2B5EF4-FFF2-40B4-BE49-F238E27FC236}">
-                <a16:creationId xmlns:a16="http://schemas.microsoft.com/office/drawing/2014/main" id="{496D3A9A-45CB-4574-8510-D21DAF3ADAE2}"/>
-              </a:ext>
-            </a:extLst>
-          </p:cNvPr>
-          <p:cNvSpPr>
-            <a:spLocks xmlns:a="http://schemas.openxmlformats.org/drawingml/2006/main" noGrp="1"/>
-          </p:cNvSpPr>
-          <p:nvPr/>
-        </p:nvSpPr>
-        <p:spPr>
-          <a:xfrm xmlns:a="http://schemas.openxmlformats.org/drawingml/2006/main">
-            <a:off x="2380258" y="2726730"/>
-            <a:ext cx="1352352" cy="335756"/>
-          </a:xfrm>
-          <a:prstGeom xmlns:a="http://schemas.openxmlformats.org/drawingml/2006/main" prst="rect">
-            <a:avLst/>
-          </a:prstGeom>
-          <a:noFill xmlns:a="http://schemas.openxmlformats.org/drawingml/2006/main"/>
-          <a:ln xmlns:a="http://schemas.openxmlformats.org/drawingml/2006/main" w="0">
-            <a:noFill/>
-          </a:ln>
-        </p:spPr>
-        <p:txBody>
-          <a:bodyPr xmlns:a="http://schemas.openxmlformats.org/drawingml/2006/main" wrap="square" lIns="0" tIns="0" rIns="0" bIns="0" anchor="t">
-            <a:noAutofit/>
-          </a:bodyPr>
-          <a:lstStyle xmlns:a="http://schemas.openxmlformats.org/drawingml/2006/main"/>
-          <a:p xmlns:a="http://schemas.openxmlformats.org/drawingml/2006/main">
-            <a:pPr algn="ctr">
-              <a:buNone/>
-              <a:defRPr sz="1616" b="0">
-                <a:solidFill>
-                  <a:srgbClr val="111111"/>
-                </a:solidFill>
-                <a:latin typeface="Calibri"/>
-                <a:ea typeface="Calibri"/>
-                <a:cs typeface="Calibri"/>
-              </a:defRPr>
-            </a:pPr>
-            <a:r>
-              <a:rPr sz="1616" b="0">
-                <a:solidFill>
-                  <a:srgbClr val="111111"/>
-                </a:solidFill>
-                <a:latin typeface="Calibri"/>
-                <a:ea typeface="Calibri"/>
-                <a:cs typeface="Calibri"/>
-              </a:rPr>
-              <a:t>Mätpunkt A</a:t>
-            </a:r>
-          </a:p>
-        </p:txBody>
-      </p:sp>
-      <p:sp>
-        <p:nvSpPr>
-          <p:cNvPr id="17" name="Mätpunkt B">
-            <a:extLst xmlns:a="http://schemas.openxmlformats.org/drawingml/2006/main">
-              <a:ext uri="{FF2B5EF4-FFF2-40B4-BE49-F238E27FC236}">
-                <a16:creationId xmlns:a16="http://schemas.microsoft.com/office/drawing/2014/main" id="{6B0A73E1-A78A-4143-BB01-EC1E055EF92B}"/>
-              </a:ext>
-            </a:extLst>
-          </p:cNvPr>
-          <p:cNvSpPr>
-            <a:spLocks xmlns:a="http://schemas.openxmlformats.org/drawingml/2006/main" noGrp="1"/>
-          </p:cNvSpPr>
-          <p:nvPr/>
-        </p:nvSpPr>
-        <p:spPr>
-          <a:xfrm xmlns:a="http://schemas.openxmlformats.org/drawingml/2006/main">
-            <a:off x="5551289" y="2726730"/>
-            <a:ext cx="1352352" cy="335756"/>
-          </a:xfrm>
-          <a:prstGeom xmlns:a="http://schemas.openxmlformats.org/drawingml/2006/main" prst="rect">
-            <a:avLst/>
-          </a:prstGeom>
-          <a:noFill xmlns:a="http://schemas.openxmlformats.org/drawingml/2006/main"/>
-          <a:ln xmlns:a="http://schemas.openxmlformats.org/drawingml/2006/main" w="0">
-            <a:noFill/>
-          </a:ln>
-        </p:spPr>
-        <p:txBody>
-          <a:bodyPr xmlns:a="http://schemas.openxmlformats.org/drawingml/2006/main" wrap="square" lIns="0" tIns="0" rIns="0" bIns="0" anchor="t">
-            <a:noAutofit/>
-          </a:bodyPr>
-          <a:lstStyle xmlns:a="http://schemas.openxmlformats.org/drawingml/2006/main"/>
-          <a:p xmlns:a="http://schemas.openxmlformats.org/drawingml/2006/main">
-            <a:pPr algn="ctr">
-              <a:buNone/>
-              <a:defRPr sz="1616" b="0">
-                <a:solidFill>
-                  <a:srgbClr val="111111"/>
-                </a:solidFill>
-                <a:latin typeface="Calibri"/>
-                <a:ea typeface="Calibri"/>
-                <a:cs typeface="Calibri"/>
-              </a:defRPr>
-            </a:pPr>
-            <a:r>
-              <a:rPr sz="1616" b="0">
-                <a:solidFill>
-                  <a:srgbClr val="111111"/>
-                </a:solidFill>
-                <a:latin typeface="Calibri"/>
-                <a:ea typeface="Calibri"/>
-                <a:cs typeface="Calibri"/>
-              </a:rPr>
-              <a:t>Mätpunkt B</a:t>
-            </a:r>
-          </a:p>
-        </p:txBody>
-      </p:sp>
-      <p:sp>
-        <p:nvSpPr>
           <p:cNvPr id="18" name="Driftläge och matningsväg påverkar analysen">
             <a:extLst xmlns:a="http://schemas.openxmlformats.org/drawingml/2006/main">
               <a:ext uri="{FF2B5EF4-FFF2-40B4-BE49-F238E27FC236}">
@@ -17575,6 +16923,30 @@
           </a:p>
         </p:txBody>
       </p:sp>
+      <p:pic xmlns:a="http://schemas.openxmlformats.org/drawingml/2006/main" xmlns:r="http://schemas.openxmlformats.org/officeDocument/2006/relationships">
+        <p:nvPicPr>
+          <p:cNvPr id="23" name="schema-enlinje" descr="Enlinjeschema: källa, skydd, fördelning och last i en kedja, med mätpunkt A och B."/>
+          <p:cNvPicPr>
+            <a:picLocks noChangeAspect="1"/>
+          </p:cNvPicPr>
+          <p:nvPr/>
+        </p:nvPicPr>
+        <p:blipFill>
+          <a:blip r:embed="rId3"/>
+          <a:stretch>
+            <a:fillRect/>
+          </a:stretch>
+        </p:blipFill>
+        <p:spPr>
+          <a:xfrm>
+            <a:off x="610538" y="2395728"/>
+            <a:ext cx="7922924" cy="2340864"/>
+          </a:xfrm>
+          <a:prstGeom prst="rect">
+            <a:avLst/>
+          </a:prstGeom>
+        </p:spPr>
+      </p:pic>
     </p:spTree>
     <p:extLst>
       <p:ext uri="{BB962C8B-B14F-4D97-AF65-F5344CB8AC3E}">

--- a/sjoskolan/vecka-44/aktuell/v44_01_Lagspanningssystem_elev.pptx
+++ b/sjoskolan/vecka-44/aktuell/v44_01_Lagspanningssystem_elev.pptx
@@ -4571,7 +4571,40 @@
                 <a:ea typeface="Calibri"/>
                 <a:cs typeface="Calibri"/>
               </a:rPr>
-              <a:t>Ifel ≈ U/Zfel</a:t>
+              <a:t>I</a:t>
+            </a:r>
+            <a:r>
+              <a:rPr sz="2400" b="1" baseline="-25000">
+                <a:solidFill>
+                  <a:srgbClr val="064F91"/>
+                </a:solidFill>
+                <a:latin typeface="Calibri"/>
+                <a:ea typeface="Calibri"/>
+                <a:cs typeface="Calibri"/>
+              </a:rPr>
+              <a:t>fel</a:t>
+            </a:r>
+            <a:r>
+              <a:rPr sz="2400" b="1">
+                <a:solidFill>
+                  <a:srgbClr val="064F91"/>
+                </a:solidFill>
+                <a:latin typeface="Calibri"/>
+                <a:ea typeface="Calibri"/>
+                <a:cs typeface="Calibri"/>
+              </a:rPr>
+              <a:t> ≈ U/Z</a:t>
+            </a:r>
+            <a:r>
+              <a:rPr sz="2400" b="1" baseline="-25000">
+                <a:solidFill>
+                  <a:srgbClr val="064F91"/>
+                </a:solidFill>
+                <a:latin typeface="Calibri"/>
+                <a:ea typeface="Calibri"/>
+                <a:cs typeface="Calibri"/>
+              </a:rPr>
+              <a:t>fel</a:t>
             </a:r>
           </a:p>
         </p:txBody>

--- a/sjoskolan/vecka-44/aktuell/v44_01_Lagspanningssystem_elev.pptx
+++ b/sjoskolan/vecka-44/aktuell/v44_01_Lagspanningssystem_elev.pptx
@@ -9144,7 +9144,29 @@
                 <a:ea typeface="Calibri"/>
                 <a:cs typeface="Calibri"/>
               </a:rPr>
-              <a:t>Iₖ ≈ U₀/</a:t>
+              <a:t>I</a:t>
+            </a:r>
+            <a:r>
+              <a:rPr sz="2925" b="1" baseline="-25000">
+                <a:solidFill>
+                  <a:srgbClr val="064F91"/>
+                </a:solidFill>
+                <a:latin typeface="Calibri"/>
+                <a:ea typeface="Calibri"/>
+                <a:cs typeface="Calibri"/>
+              </a:rPr>
+              <a:t>k</a:t>
+            </a:r>
+            <a:r>
+              <a:rPr sz="2925" b="1">
+                <a:solidFill>
+                  <a:srgbClr val="064F91"/>
+                </a:solidFill>
+                <a:latin typeface="Calibri"/>
+                <a:ea typeface="Calibri"/>
+                <a:cs typeface="Calibri"/>
+              </a:rPr>
+              <a:t> ≈ U₀/</a:t>
             </a:r>
             <a:r>
               <a:rPr sz="2925" b="1">
@@ -9589,7 +9611,29 @@
                 <a:ea typeface="Calibri"/>
                 <a:cs typeface="Calibri"/>
               </a:rPr>
-              <a:t>Iₖ ≈ U₀/</a:t>
+              <a:t>I</a:t>
+            </a:r>
+            <a:r>
+              <a:rPr sz="2325" b="1" baseline="-25000">
+                <a:solidFill>
+                  <a:srgbClr val="064F91"/>
+                </a:solidFill>
+                <a:latin typeface="Calibri"/>
+                <a:ea typeface="Calibri"/>
+                <a:cs typeface="Calibri"/>
+              </a:rPr>
+              <a:t>k</a:t>
+            </a:r>
+            <a:r>
+              <a:rPr sz="2325" b="1">
+                <a:solidFill>
+                  <a:srgbClr val="064F91"/>
+                </a:solidFill>
+                <a:latin typeface="Calibri"/>
+                <a:ea typeface="Calibri"/>
+                <a:cs typeface="Calibri"/>
+              </a:rPr>
+              <a:t> ≈ U₀/</a:t>
             </a:r>
             <a:r>
               <a:rPr sz="2325" b="1">
@@ -9668,7 +9712,29 @@
                 <a:ea typeface="Calibri"/>
                 <a:cs typeface="Calibri"/>
               </a:rPr>
-              <a:t>1. Iₖ ≈ 230/0,575 = 400 A.</a:t>
+              <a:t>1. I</a:t>
+            </a:r>
+            <a:r>
+              <a:rPr sz="1800" b="0" baseline="-25000">
+                <a:solidFill>
+                  <a:srgbClr val="111111"/>
+                </a:solidFill>
+                <a:latin typeface="Calibri"/>
+                <a:ea typeface="Calibri"/>
+                <a:cs typeface="Calibri"/>
+              </a:rPr>
+              <a:t>k</a:t>
+            </a:r>
+            <a:r>
+              <a:rPr sz="1800" b="0">
+                <a:solidFill>
+                  <a:srgbClr val="111111"/>
+                </a:solidFill>
+                <a:latin typeface="Calibri"/>
+                <a:ea typeface="Calibri"/>
+                <a:cs typeface="Calibri"/>
+              </a:rPr>
+              <a:t> ≈ 230/0,575 = 400 A.</a:t>
             </a:r>
           </a:p>
           <a:p xmlns:a="http://schemas.openxmlformats.org/drawingml/2006/main">
@@ -9724,7 +9790,29 @@
                 <a:ea typeface="Calibri"/>
                 <a:cs typeface="Calibri"/>
               </a:rPr>
-              <a:t> ökar till 2,3 Ω blir Iₖ ≈ 230/2,3 = 100 A.</a:t>
+              <a:t> ökar till 2,3 Ω blir I</a:t>
+            </a:r>
+            <a:r>
+              <a:rPr sz="1800" b="0" baseline="-25000">
+                <a:solidFill>
+                  <a:srgbClr val="111111"/>
+                </a:solidFill>
+                <a:latin typeface="Calibri"/>
+                <a:ea typeface="Calibri"/>
+                <a:cs typeface="Calibri"/>
+              </a:rPr>
+              <a:t>k</a:t>
+            </a:r>
+            <a:r>
+              <a:rPr sz="1800" b="0">
+                <a:solidFill>
+                  <a:srgbClr val="111111"/>
+                </a:solidFill>
+                <a:latin typeface="Calibri"/>
+                <a:ea typeface="Calibri"/>
+                <a:cs typeface="Calibri"/>
+              </a:rPr>
+              <a:t> ≈ 230/2,3 = 100 A.</a:t>
             </a:r>
           </a:p>
           <a:p xmlns:a="http://schemas.openxmlformats.org/drawingml/2006/main">

--- a/sjoskolan/vecka-44/aktuell/v44_01_Lagspanningssystem_elev.pptx
+++ b/sjoskolan/vecka-44/aktuell/v44_01_Lagspanningssystem_elev.pptx
@@ -11248,7 +11248,7 @@
                 <a:ea typeface="Calibri"/>
                 <a:cs typeface="Calibri"/>
               </a:rPr>
-              <a:t>Förutsättningar: Förenklad beräkning med U</a:t>
+              <a:t>Förutsättningar: TN-system i land. Förenklad beräkning med U</a:t>
             </a:r>
             <a:r>
               <a:rPr sz="2025" b="0" baseline="-25000">

--- a/sjoskolan/vecka-44/aktuell/v44_01_Lagspanningssystem_elev.pptx
+++ b/sjoskolan/vecka-44/aktuell/v44_01_Lagspanningssystem_elev.pptx
@@ -3847,7 +3847,7 @@
                 <a:ea typeface="Calibri"/>
                 <a:cs typeface="Calibri"/>
               </a:rPr>
-              <a:t>N leder normal returström, PE har skyddsfunktion</a:t>
+              <a:t>Jämför N och PE i normal drift och vid fel</a:t>
             </a:r>
           </a:p>
         </p:txBody>
@@ -3904,7 +3904,7 @@
                 <a:ea typeface="Calibri"/>
                 <a:cs typeface="Calibri"/>
               </a:rPr>
-              <a:t>I TN-S är neutralledare N och skyddsledare PE separata längs den berörda delen av systemet.</a:t>
+              <a:t>N är neutralledare och PE skyddsledare. Läs genomgången del 1, avsnitt 3: TN-system.</a:t>
             </a:r>
           </a:p>
         </p:txBody>
@@ -4018,7 +4018,7 @@
                 <a:ea typeface="Calibri"/>
                 <a:cs typeface="Calibri"/>
               </a:rPr>
-              <a:t>Arbetsgång: Jämför ledarnas uppgift i normaldrift och vid fel. Skilj funktion från ett tillfälligt lika potentialvärde.</a:t>
+              <a:t>Arbetsgång: Jämför vad ledarna gör i normal drift och vid fel. Titta på vad de gör, inte på vilken spänning de har.</a:t>
             </a:r>
           </a:p>
         </p:txBody>
@@ -4661,7 +4661,7 @@
                 <a:ea typeface="Calibri"/>
                 <a:cs typeface="Calibri"/>
               </a:rPr>
-              <a:t>Hög impedans i felslingan begränsar strömmen, så den kanske inte räcker för att ett överströmsskydd ska lösa ut.</a:t>
+              <a:t>I TT går felströmmen genom jorden mellan två jordtag. Jordtagen har resistans. Tänk på vad det gör med strömmens storlek.</a:t>
             </a:r>
           </a:p>
         </p:txBody>
@@ -5328,7 +5328,7 @@
                 <a:ea typeface="Calibri"/>
                 <a:cs typeface="Calibri"/>
               </a:rPr>
-              <a:t>IT-systemets isolation övervakas mot jord</a:t>
+              <a:t>Isolationsövervakning i IT-nät</a:t>
             </a:r>
           </a:p>
         </p:txBody>
@@ -5385,7 +5385,7 @@
                 <a:ea typeface="Calibri"/>
                 <a:cs typeface="Calibri"/>
               </a:rPr>
-              <a:t>Fasledarna är isolerade från jord eller anslutna via en hög impedans, och utsatta delar är skyddsjordade.</a:t>
+              <a:t>I ett IT-nät är faserna inte direkt kopplade till skrovet. Metallhöljen på apparaterna är kopplade till skrovet.</a:t>
             </a:r>
           </a:p>
         </p:txBody>
@@ -5776,7 +5776,7 @@
                 <a:ea typeface="Calibri"/>
                 <a:cs typeface="Calibri"/>
               </a:rPr>
-              <a:t>Vad övervakar isolationsvakten i ett IT-system, i princip?</a:t>
+              <a:t>Ett IT-nät har en isolationsvakt. Vad mäter den?</a:t>
             </a:r>
           </a:p>
         </p:txBody>
@@ -6500,7 +6500,7 @@
                 <a:ea typeface="Calibri"/>
                 <a:cs typeface="Calibri"/>
               </a:rPr>
-              <a:t>Isolationslarmet går i ett IT-system men lasten fortsätter. Varför är detta ingen grund för att ignorera larmet?</a:t>
+              <a:t>Isolationsvakten i ett IT-nät larmar. Lasten går ändå som vanligt. Varför får du inte strunta i larmet?</a:t>
             </a:r>
           </a:p>
         </p:txBody>
@@ -9166,7 +9166,40 @@
                 <a:ea typeface="Calibri"/>
                 <a:cs typeface="Calibri"/>
               </a:rPr>
-              <a:t> ≈ U₀/</a:t>
+              <a:t> ≈ </a:t>
+            </a:r>
+            <a:r>
+              <a:rPr sz="2925" b="1">
+                <a:solidFill>
+                  <a:srgbClr val="064F91"/>
+                </a:solidFill>
+                <a:latin typeface="Calibri"/>
+                <a:ea typeface="Calibri"/>
+                <a:cs typeface="Calibri"/>
+              </a:rPr>
+              <a:t>U</a:t>
+            </a:r>
+            <a:r>
+              <a:rPr sz="2925" b="1" baseline="-25000">
+                <a:solidFill>
+                  <a:srgbClr val="064F91"/>
+                </a:solidFill>
+                <a:latin typeface="Calibri"/>
+                <a:ea typeface="Calibri"/>
+                <a:cs typeface="Calibri"/>
+              </a:rPr>
+              <a:t>0</a:t>
+            </a:r>
+            <a:r>
+              <a:rPr sz="2925" b="1">
+                <a:solidFill>
+                  <a:srgbClr val="064F91"/>
+                </a:solidFill>
+                <a:latin typeface="Calibri"/>
+                <a:ea typeface="Calibri"/>
+                <a:cs typeface="Calibri"/>
+              </a:rPr>
+              <a:t>/</a:t>
             </a:r>
             <a:r>
               <a:rPr sz="2925" b="1">
@@ -9521,7 +9554,40 @@
                 <a:ea typeface="Calibri"/>
                 <a:cs typeface="Calibri"/>
               </a:rPr>
-              <a:t>En förenklad felströmsslinga har U₀ = 230 V och </a:t>
+              <a:t>En förenklad felströmsslinga har </a:t>
+            </a:r>
+            <a:r>
+              <a:rPr sz="2100" b="0">
+                <a:solidFill>
+                  <a:srgbClr val="111111"/>
+                </a:solidFill>
+                <a:latin typeface="Calibri"/>
+                <a:ea typeface="Calibri"/>
+                <a:cs typeface="Calibri"/>
+              </a:rPr>
+              <a:t>U</a:t>
+            </a:r>
+            <a:r>
+              <a:rPr sz="2100" b="0" baseline="-25000">
+                <a:solidFill>
+                  <a:srgbClr val="111111"/>
+                </a:solidFill>
+                <a:latin typeface="Calibri"/>
+                <a:ea typeface="Calibri"/>
+                <a:cs typeface="Calibri"/>
+              </a:rPr>
+              <a:t>0</a:t>
+            </a:r>
+            <a:r>
+              <a:rPr sz="2100" b="0">
+                <a:solidFill>
+                  <a:srgbClr val="111111"/>
+                </a:solidFill>
+                <a:latin typeface="Calibri"/>
+                <a:ea typeface="Calibri"/>
+                <a:cs typeface="Calibri"/>
+              </a:rPr>
+              <a:t> = 230 V och </a:t>
             </a:r>
             <a:r>
               <a:rPr sz="2100" b="0">
@@ -9633,7 +9699,40 @@
                 <a:ea typeface="Calibri"/>
                 <a:cs typeface="Calibri"/>
               </a:rPr>
-              <a:t> ≈ U₀/</a:t>
+              <a:t> ≈ </a:t>
+            </a:r>
+            <a:r>
+              <a:rPr sz="2325" b="1">
+                <a:solidFill>
+                  <a:srgbClr val="064F91"/>
+                </a:solidFill>
+                <a:latin typeface="Calibri"/>
+                <a:ea typeface="Calibri"/>
+                <a:cs typeface="Calibri"/>
+              </a:rPr>
+              <a:t>U</a:t>
+            </a:r>
+            <a:r>
+              <a:rPr sz="2325" b="1" baseline="-25000">
+                <a:solidFill>
+                  <a:srgbClr val="064F91"/>
+                </a:solidFill>
+                <a:latin typeface="Calibri"/>
+                <a:ea typeface="Calibri"/>
+                <a:cs typeface="Calibri"/>
+              </a:rPr>
+              <a:t>0</a:t>
+            </a:r>
+            <a:r>
+              <a:rPr sz="2325" b="1">
+                <a:solidFill>
+                  <a:srgbClr val="064F91"/>
+                </a:solidFill>
+                <a:latin typeface="Calibri"/>
+                <a:ea typeface="Calibri"/>
+                <a:cs typeface="Calibri"/>
+              </a:rPr>
+              <a:t>/</a:t>
             </a:r>
             <a:r>
               <a:rPr sz="2325" b="1">
@@ -11090,7 +11189,18 @@
                 <a:ea typeface="Calibri"/>
                 <a:cs typeface="Calibri"/>
               </a:rPr>
-              <a:t>/Zs</a:t>
+              <a:t>/Z</a:t>
+            </a:r>
+            <a:r>
+              <a:rPr sz="2400" b="1" baseline="-25000">
+                <a:solidFill>
+                  <a:srgbClr val="064F91"/>
+                </a:solidFill>
+                <a:latin typeface="Calibri"/>
+                <a:ea typeface="Calibri"/>
+                <a:cs typeface="Calibri"/>
+              </a:rPr>
+              <a:t>s</a:t>
             </a:r>
           </a:p>
         </p:txBody>
@@ -11191,7 +11301,29 @@
                 <a:ea typeface="Calibri"/>
                 <a:cs typeface="Calibri"/>
               </a:rPr>
-              <a:t> den drivande spänningen och Zs impedansen i hela felslingan.</a:t>
+              <a:t> den drivande spänningen och Z</a:t>
+            </a:r>
+            <a:r>
+              <a:rPr sz="2100" b="0" baseline="-25000">
+                <a:solidFill>
+                  <a:srgbClr val="111111"/>
+                </a:solidFill>
+                <a:latin typeface="Calibri"/>
+                <a:ea typeface="Calibri"/>
+                <a:cs typeface="Calibri"/>
+              </a:rPr>
+              <a:t>s</a:t>
+            </a:r>
+            <a:r>
+              <a:rPr sz="2100" b="0">
+                <a:solidFill>
+                  <a:srgbClr val="111111"/>
+                </a:solidFill>
+                <a:latin typeface="Calibri"/>
+                <a:ea typeface="Calibri"/>
+                <a:cs typeface="Calibri"/>
+              </a:rPr>
+              <a:t> impedansen i hela felslingan.</a:t>
             </a:r>
           </a:p>
         </p:txBody>
@@ -11270,7 +11402,29 @@
                 <a:ea typeface="Calibri"/>
                 <a:cs typeface="Calibri"/>
               </a:rPr>
-              <a:t> = 230 V och Zs = 0,46 Ω.</a:t>
+              <a:t> = 230 V och Z</a:t>
+            </a:r>
+            <a:r>
+              <a:rPr sz="2025" b="0" baseline="-25000">
+                <a:solidFill>
+                  <a:srgbClr val="111111"/>
+                </a:solidFill>
+                <a:latin typeface="Calibri"/>
+                <a:ea typeface="Calibri"/>
+                <a:cs typeface="Calibri"/>
+              </a:rPr>
+              <a:t>s</a:t>
+            </a:r>
+            <a:r>
+              <a:rPr sz="2025" b="0">
+                <a:solidFill>
+                  <a:srgbClr val="111111"/>
+                </a:solidFill>
+                <a:latin typeface="Calibri"/>
+                <a:ea typeface="Calibri"/>
+                <a:cs typeface="Calibri"/>
+              </a:rPr>
+              <a:t> = 0,46 Ω.</a:t>
             </a:r>
           </a:p>
         </p:txBody>
@@ -11626,7 +11780,29 @@
                 <a:ea typeface="Calibri"/>
                 <a:cs typeface="Calibri"/>
               </a:rPr>
-              <a:t> = 230 V och Zs = 0,46 Ω. Beräkna I</a:t>
+              <a:t> = 230 V och Z</a:t>
+            </a:r>
+            <a:r>
+              <a:rPr sz="2400" b="0" baseline="-25000">
+                <a:solidFill>
+                  <a:srgbClr val="111111"/>
+                </a:solidFill>
+                <a:latin typeface="Calibri"/>
+                <a:ea typeface="Calibri"/>
+                <a:cs typeface="Calibri"/>
+              </a:rPr>
+              <a:t>s</a:t>
+            </a:r>
+            <a:r>
+              <a:rPr sz="2400" b="0">
+                <a:solidFill>
+                  <a:srgbClr val="111111"/>
+                </a:solidFill>
+                <a:latin typeface="Calibri"/>
+                <a:ea typeface="Calibri"/>
+                <a:cs typeface="Calibri"/>
+              </a:rPr>
+              <a:t> = 0,46 Ω. Beräkna I</a:t>
             </a:r>
             <a:r>
               <a:rPr sz="2400" b="0" baseline="-25000">
@@ -11992,7 +12168,7 @@
                 <a:ea typeface="Calibri"/>
                 <a:cs typeface="Calibri"/>
               </a:rPr>
-              <a:t>/Zs</a:t>
+              <a:t>/Z</a:t>
             </a:r>
             <a:r>
               <a:rPr sz="2400" b="1" baseline="-25000">
@@ -12003,7 +12179,7 @@
                 <a:ea typeface="Calibri"/>
                 <a:cs typeface="Calibri"/>
               </a:rPr>
-              <a:t>1</a:t>
+              <a:t>s,1</a:t>
             </a:r>
             <a:r>
               <a:rPr sz="2400" b="1">
@@ -12058,7 +12234,7 @@
                 <a:ea typeface="Calibri"/>
                 <a:cs typeface="Calibri"/>
               </a:rPr>
-              <a:t>/Zs</a:t>
+              <a:t>/Z</a:t>
             </a:r>
             <a:r>
               <a:rPr sz="2400" b="1" baseline="-25000">
@@ -12069,7 +12245,7 @@
                 <a:ea typeface="Calibri"/>
                 <a:cs typeface="Calibri"/>
               </a:rPr>
-              <a:t>2</a:t>
+              <a:t>s,2</a:t>
             </a:r>
           </a:p>
         </p:txBody>
@@ -12126,7 +12302,7 @@
                 <a:ea typeface="Calibri"/>
                 <a:cs typeface="Calibri"/>
               </a:rPr>
-              <a:t>1 och 2 står för de två fallen. Vid samma U</a:t>
+              <a:t>1 och 2 står för de två fallen, före och efter ändringen. U</a:t>
             </a:r>
             <a:r>
               <a:rPr sz="2100" b="0" baseline="-25000">
@@ -12148,7 +12324,7 @@
                 <a:ea typeface="Calibri"/>
                 <a:cs typeface="Calibri"/>
               </a:rPr>
-              <a:t> blir strömmen hälften så stor när Zs blir dubbelt så stor.</a:t>
+              <a:t> är samma i båda fallen.</a:t>
             </a:r>
           </a:p>
         </p:txBody>
@@ -12205,7 +12381,40 @@
                 <a:ea typeface="Calibri"/>
                 <a:cs typeface="Calibri"/>
               </a:rPr>
-              <a:t>Förutsättningar: U₀ = 230 V. Impedansen ökar från 0,46 till 0,92 Ω.</a:t>
+              <a:t>Förutsättningar: </a:t>
+            </a:r>
+            <a:r>
+              <a:rPr sz="2025" b="0">
+                <a:solidFill>
+                  <a:srgbClr val="111111"/>
+                </a:solidFill>
+                <a:latin typeface="Calibri"/>
+                <a:ea typeface="Calibri"/>
+                <a:cs typeface="Calibri"/>
+              </a:rPr>
+              <a:t>U</a:t>
+            </a:r>
+            <a:r>
+              <a:rPr sz="2025" b="0" baseline="-25000">
+                <a:solidFill>
+                  <a:srgbClr val="111111"/>
+                </a:solidFill>
+                <a:latin typeface="Calibri"/>
+                <a:ea typeface="Calibri"/>
+                <a:cs typeface="Calibri"/>
+              </a:rPr>
+              <a:t>0</a:t>
+            </a:r>
+            <a:r>
+              <a:rPr sz="2025" b="0">
+                <a:solidFill>
+                  <a:srgbClr val="111111"/>
+                </a:solidFill>
+                <a:latin typeface="Calibri"/>
+                <a:ea typeface="Calibri"/>
+                <a:cs typeface="Calibri"/>
+              </a:rPr>
+              <a:t> = 230 V. Impedansen ökar från 0,46 till 0,92 Ω.</a:t>
             </a:r>
           </a:p>
         </p:txBody>
@@ -13053,7 +13262,29 @@
                 <a:ea typeface="Calibri"/>
                 <a:cs typeface="Calibri"/>
               </a:rPr>
-              <a:t>Zs ökar från 0,46 till 0,92 Ω vid oförändrade 230 V. Hur ändras felströmmen?</a:t>
+              <a:t>Z</a:t>
+            </a:r>
+            <a:r>
+              <a:rPr sz="2400" b="0" baseline="-25000">
+                <a:solidFill>
+                  <a:srgbClr val="111111"/>
+                </a:solidFill>
+                <a:latin typeface="Calibri"/>
+                <a:ea typeface="Calibri"/>
+                <a:cs typeface="Calibri"/>
+              </a:rPr>
+              <a:t>s</a:t>
+            </a:r>
+            <a:r>
+              <a:rPr sz="2400" b="0">
+                <a:solidFill>
+                  <a:srgbClr val="111111"/>
+                </a:solidFill>
+                <a:latin typeface="Calibri"/>
+                <a:ea typeface="Calibri"/>
+                <a:cs typeface="Calibri"/>
+              </a:rPr>
+              <a:t> ökar från 0,46 till 0,92 Ω vid oförändrade 230 V. Hur ändras felströmmen?</a:t>
             </a:r>
           </a:p>
         </p:txBody>
@@ -13386,7 +13617,7 @@
                 <a:ea typeface="Calibri"/>
                 <a:cs typeface="Calibri"/>
               </a:rPr>
-              <a:t>Hur snabbt ett överströmsskydd löser beror på strömmen och skyddets ström–tidkurva.</a:t>
+              <a:t>Ett skydd löser snabbare när strömmen är stor. Hur snabbt står i skyddets ström–tidskurva, ett diagram från tillverkaren.</a:t>
             </a:r>
           </a:p>
         </p:txBody>
@@ -13777,7 +14008,7 @@
                 <a:ea typeface="Calibri"/>
                 <a:cs typeface="Calibri"/>
               </a:rPr>
-              <a:t>Med normal matning kan felströmmen bli 1 000 A, men vid reservdrift bara 200 A. Vad behöver kontrolleras när skydden planeras?</a:t>
+              <a:t>Vid ett fel blir strömmen 1 000 A med vanlig matning. På reservkraft blir den bara 200 A. Vad måste du kontrollera hos skyddet?</a:t>
             </a:r>
           </a:p>
         </p:txBody>
@@ -14224,7 +14455,7 @@
                 <a:ea typeface="Calibri"/>
                 <a:cs typeface="Calibri"/>
               </a:rPr>
-              <a:t>Arbetsgång: Ta reda på vilka nödlaster som finns, hur de reservmatas och vilka fel som kan slå ut både ordinarie utrustning och nödutrustning samtidigt.</a:t>
+              <a:t>Arbetsgång: Tänk på vad som händer med nödutrustningen om just den här fördelningen slutar fungera.</a:t>
             </a:r>
           </a:p>
         </p:txBody>
@@ -14501,7 +14732,7 @@
                 <a:ea typeface="Calibri"/>
                 <a:cs typeface="Calibri"/>
               </a:rPr>
-              <a:t>En enda fördelning matar både ordinarie utrustning och nödutrustning. Vilken fråga måste dokumentationen svara på innan systemet kan bedömas?</a:t>
+              <a:t>Samma fördelning matar både vanlig utrustning och nödutrustning. Vad måste du ta reda på i ritningar och dokument innan du kan säga om det är säkert?</a:t>
             </a:r>
           </a:p>
         </p:txBody>

--- a/sjoskolan/vecka-44/aktuell/v44_01_Lagspanningssystem_elev.pptx
+++ b/sjoskolan/vecka-44/aktuell/v44_01_Lagspanningssystem_elev.pptx
@@ -7837,7 +7837,7 @@
                 </a:solidFill>
                 <a:latin typeface="Calibri"/>
               </a:rPr>
-              <a:t>1. Läs del 1 på delsidan: teorin och de två exemplen.</a:t>
+              <a:t>1. Läs del 1 på delsidan: teorin och de två exemplen. Tryck på ”Jag har läst del 1” längst ned på sidan.</a:t>
             </a:r>
           </a:p>
           <a:p>

--- a/sjoskolan/vecka-44/aktuell/v44_01_Lagspanningssystem_elev.pptx
+++ b/sjoskolan/vecka-44/aktuell/v44_01_Lagspanningssystem_elev.pptx
@@ -7894,7 +7894,7 @@
                 </a:solidFill>
                 <a:latin typeface="Calibri"/>
               </a:rPr>
-              <a:t>4. Gör Isolationslabbet: räkna-först-uppgifterna och protokollet. Spara protokollet som PDF.</a:t>
+              <a:t>4. Isolationslabbet: gör räkna-först-uppgifterna om jordfel i IT-nätet och mätning 1–5 i protokollet. Uppgifterna om isolationsprovning gör du efter tisdagens lektion.</a:t>
             </a:r>
           </a:p>
           <a:p>
@@ -7913,7 +7913,7 @@
                 </a:solidFill>
                 <a:latin typeface="Calibri"/>
               </a:rPr>
-              <a:t>5. Efter pausen 10.00: del 2, Högspänningssystem.</a:t>
+              <a:t>5. Klockan 10.00: del 2, Högspänningssystem.</a:t>
             </a:r>
           </a:p>
           <a:p>
@@ -7932,7 +7932,7 @@
                 </a:solidFill>
                 <a:latin typeface="Calibri"/>
               </a:rPr>
-              <a:t>Inlämningen och analysen av mätdata senast fredag 30 oktober. Allt finns på veckosidan.</a:t>
+              <a:t>Inlämningen, uppgift 1–4, senast fredag 30 oktober. Allt finns på veckosidan.</a:t>
             </a:r>
           </a:p>
         </p:txBody>
@@ -8791,7 +8791,7 @@
                 </a:solidFill>
                 <a:latin typeface="Calibri"/>
               </a:rPr>
-              <a:t>Studieplanen YH03151, 18 september 2026: Elteknik och ellära, lärandemål 1 och 2</a:t>
+              <a:t>Kursplanen för Elteknik och ellära, lärandemål 1 och 2</a:t>
             </a:r>
           </a:p>
         </p:txBody>
